--- a/slides/4-14_other_chronic_drugs/4-14_other_chronic_drugs.pptx
+++ b/slides/4-14_other_chronic_drugs/4-14_other_chronic_drugs.pptx
@@ -2420,265 +2420,7 @@
       </p:sp>
       <p:sp>
         <p:nvSpPr>
-          <p:cNvPr id="11" name="Text 9"/>
-          <p:cNvSpPr txBox="1"/>
-          <p:nvPr/>
-        </p:nvSpPr>
-        <p:spPr>
-          <a:xfrm>
-            <a:off x="502920" y="1691640"/>
-            <a:ext cx="11155680" cy="3063240"/>
-          </a:xfrm>
-          <a:prstGeom prst="rect">
-            <a:avLst/>
-          </a:prstGeom>
-          <a:noFill/>
-          <a:ln/>
-        </p:spPr>
-        <p:txBody>
-          <a:bodyPr wrap="square" lIns="0" tIns="0" rIns="0" bIns="0" rtlCol="0" anchor="t"/>
-          <a:lstStyle/>
-          <a:p>
-            <a:pPr algn="l" marL="355600" indent="-355600">
-              <a:spcAft>
-                <a:spcPts val="500"/>
-              </a:spcAft>
-              <a:buSzPct val="100000"/>
-              <a:buChar char="•"/>
-            </a:pPr>
-            <a:r>
-              <a:rPr lang="ja-JP" altLang="en-US" sz="2400" b="1" dirty="0">
-                <a:solidFill>
-                  <a:srgbClr val="0072B2"/>
-                </a:solidFill>
-                <a:latin typeface="メイリオ" pitchFamily="34" charset="0"/>
-                <a:ea typeface="メイリオ" pitchFamily="34" charset="-122"/>
-                <a:cs typeface="メイリオ" pitchFamily="34" charset="-120"/>
-              </a:rPr>
-              <a:t>国内添付文書：</a:t>
-            </a:r>
-            <a:r>
-              <a:rPr lang="ja-JP" altLang="en-US" sz="2400" dirty="0">
-                <a:solidFill>
-                  <a:srgbClr val="262626"/>
-                </a:solidFill>
-                <a:latin typeface="メイリオ" pitchFamily="34" charset="0"/>
-                <a:ea typeface="メイリオ" pitchFamily="34" charset="-122"/>
-                <a:cs typeface="メイリオ" pitchFamily="34" charset="-120"/>
-              </a:rPr>
-              <a:t>『手術前 24 時間は投与しないことが望ましい』</a:t>
-            </a:r>
-            <a:endParaRPr lang="ja-JP" sz="2400" dirty="0"/>
-          </a:p>
-          <a:p>
-            <a:pPr algn="l" marL="355600" indent="-355600">
-              <a:spcAft>
-                <a:spcPts val="500"/>
-              </a:spcAft>
-              <a:buSzPct val="100000"/>
-              <a:buChar char="•"/>
-            </a:pPr>
-            <a:r>
-              <a:rPr lang="ja-JP" altLang="en-US" sz="2400" b="1" dirty="0">
-                <a:solidFill>
-                  <a:srgbClr val="0072B2"/>
-                </a:solidFill>
-                <a:latin typeface="メイリオ" pitchFamily="34" charset="0"/>
-                <a:ea typeface="メイリオ" pitchFamily="34" charset="-122"/>
-                <a:cs typeface="メイリオ" pitchFamily="34" charset="-120"/>
-              </a:rPr>
-              <a:t>AHA/ACC 2024：</a:t>
-            </a:r>
-            <a:r>
-              <a:rPr lang="ja-JP" altLang="en-US" sz="2400" dirty="0">
-                <a:solidFill>
-                  <a:srgbClr val="262626"/>
-                </a:solidFill>
-                <a:latin typeface="メイリオ" pitchFamily="34" charset="0"/>
-                <a:ea typeface="メイリオ" pitchFamily="34" charset="-122"/>
-                <a:cs typeface="メイリオ" pitchFamily="34" charset="-120"/>
-              </a:rPr>
-              <a:t>高血圧は 24 時間前休薬を考慮（2b）</a:t>
-            </a:r>
-            <a:endParaRPr lang="ja-JP" sz="2400" dirty="0"/>
-          </a:p>
-          <a:p>
-            <a:pPr algn="l" marL="355600" indent="-355600">
-              <a:spcAft>
-                <a:spcPts val="500"/>
-              </a:spcAft>
-              <a:buSzPct val="100000"/>
-              <a:buChar char="•"/>
-            </a:pPr>
-            <a:r>
-              <a:rPr lang="ja-JP" altLang="en-US" sz="2400" b="1" dirty="0">
-                <a:solidFill>
-                  <a:srgbClr val="D55E00"/>
-                </a:solidFill>
-                <a:latin typeface="メイリオ" pitchFamily="34" charset="0"/>
-                <a:ea typeface="メイリオ" pitchFamily="34" charset="-122"/>
-                <a:cs typeface="メイリオ" pitchFamily="34" charset="-120"/>
-              </a:rPr>
-              <a:t>HFrEF は継続（2a）</a:t>
-            </a:r>
-            <a:r>
-              <a:rPr lang="ja-JP" altLang="en-US" sz="2400" dirty="0">
-                <a:solidFill>
-                  <a:srgbClr val="262626"/>
-                </a:solidFill>
-                <a:latin typeface="メイリオ" pitchFamily="34" charset="0"/>
-                <a:ea typeface="メイリオ" pitchFamily="34" charset="-122"/>
-                <a:cs typeface="メイリオ" pitchFamily="34" charset="-120"/>
-              </a:rPr>
-              <a:t>。</a:t>
-            </a:r>
-            <a:r>
-              <a:rPr lang="ja-JP" altLang="en-US" sz="2400" b="1" dirty="0">
-                <a:solidFill>
-                  <a:srgbClr val="0072B2"/>
-                </a:solidFill>
-                <a:latin typeface="メイリオ" pitchFamily="34" charset="0"/>
-                <a:ea typeface="メイリオ" pitchFamily="34" charset="-122"/>
-                <a:cs typeface="メイリオ" pitchFamily="34" charset="-120"/>
-              </a:rPr>
-              <a:t>ESC 2022：</a:t>
-            </a:r>
-            <a:r>
-              <a:rPr lang="ja-JP" altLang="en-US" sz="2400" dirty="0">
-                <a:solidFill>
-                  <a:srgbClr val="262626"/>
-                </a:solidFill>
-                <a:latin typeface="メイリオ" pitchFamily="34" charset="0"/>
-                <a:ea typeface="メイリオ" pitchFamily="34" charset="-122"/>
-                <a:cs typeface="メイリオ" pitchFamily="34" charset="-120"/>
-              </a:rPr>
-              <a:t>心不全なしは当日休薬（IIa）</a:t>
-            </a:r>
-            <a:endParaRPr lang="ja-JP" sz="2400" dirty="0"/>
-          </a:p>
-          <a:p>
-            <a:pPr algn="l" marL="355600" indent="-355600">
-              <a:spcAft>
-                <a:spcPts val="500"/>
-              </a:spcAft>
-              <a:buSzPct val="100000"/>
-              <a:buChar char="•"/>
-            </a:pPr>
-            <a:r>
-              <a:rPr lang="ja-JP" altLang="en-US" sz="2400" b="1" dirty="0">
-                <a:solidFill>
-                  <a:srgbClr val="0072B2"/>
-                </a:solidFill>
-                <a:latin typeface="メイリオ" pitchFamily="34" charset="0"/>
-                <a:ea typeface="メイリオ" pitchFamily="34" charset="-122"/>
-                <a:cs typeface="メイリオ" pitchFamily="34" charset="-120"/>
-              </a:rPr>
-              <a:t>STOP-or-NOT：</a:t>
-            </a:r>
-            <a:r>
-              <a:rPr lang="ja-JP" altLang="en-US" sz="2400" dirty="0">
-                <a:solidFill>
-                  <a:srgbClr val="262626"/>
-                </a:solidFill>
-                <a:latin typeface="メイリオ" pitchFamily="34" charset="0"/>
-                <a:ea typeface="メイリオ" pitchFamily="34" charset="-122"/>
-                <a:cs typeface="メイリオ" pitchFamily="34" charset="-120"/>
-              </a:rPr>
-              <a:t>続けても止めても死亡・合併症は </a:t>
-            </a:r>
-            <a:r>
-              <a:rPr lang="ja-JP" altLang="en-US" sz="2400" b="1" dirty="0">
-                <a:solidFill>
-                  <a:srgbClr val="D55E00"/>
-                </a:solidFill>
-                <a:latin typeface="メイリオ" pitchFamily="34" charset="0"/>
-                <a:ea typeface="メイリオ" pitchFamily="34" charset="-122"/>
-                <a:cs typeface="メイリオ" pitchFamily="34" charset="-120"/>
-              </a:rPr>
-              <a:t>22% で同じ</a:t>
-            </a:r>
-            <a:endParaRPr lang="ja-JP" sz="2400" dirty="0"/>
-          </a:p>
-          <a:p>
-            <a:pPr algn="l" marL="355600" indent="-355600">
-              <a:spcAft>
-                <a:spcPts val="500"/>
-              </a:spcAft>
-              <a:buSzPct val="100000"/>
-              <a:buChar char="•"/>
-            </a:pPr>
-            <a:r>
-              <a:rPr lang="ja-JP" altLang="en-US" sz="2400" dirty="0">
-                <a:solidFill>
-                  <a:srgbClr val="262626"/>
-                </a:solidFill>
-                <a:latin typeface="メイリオ" pitchFamily="34" charset="0"/>
-                <a:ea typeface="メイリオ" pitchFamily="34" charset="-122"/>
-                <a:cs typeface="メイリオ" pitchFamily="34" charset="-120"/>
-              </a:rPr>
-              <a:t>術中低血圧は継続 54%・休薬 41%。</a:t>
-            </a:r>
-            <a:r>
-              <a:rPr lang="ja-JP" altLang="en-US" sz="2400" b="1" dirty="0">
-                <a:solidFill>
-                  <a:srgbClr val="0072B2"/>
-                </a:solidFill>
-                <a:latin typeface="メイリオ" pitchFamily="34" charset="0"/>
-                <a:ea typeface="メイリオ" pitchFamily="34" charset="-122"/>
-                <a:cs typeface="メイリオ" pitchFamily="34" charset="-120"/>
-              </a:rPr>
-              <a:t>SPACE：</a:t>
-            </a:r>
-            <a:r>
-              <a:rPr lang="ja-JP" altLang="en-US" sz="2400" dirty="0">
-                <a:solidFill>
-                  <a:srgbClr val="262626"/>
-                </a:solidFill>
-                <a:latin typeface="メイリオ" pitchFamily="34" charset="0"/>
-                <a:ea typeface="メイリオ" pitchFamily="34" charset="-122"/>
-                <a:cs typeface="メイリオ" pitchFamily="34" charset="-120"/>
-              </a:rPr>
-              <a:t>休薬で術後高血圧が多め</a:t>
-            </a:r>
-            <a:endParaRPr lang="ja-JP" sz="2400" dirty="0"/>
-          </a:p>
-          <a:p>
-            <a:pPr algn="l" marL="355600" indent="-355600">
-              <a:spcAft>
-                <a:spcPts val="500"/>
-              </a:spcAft>
-              <a:buSzPct val="100000"/>
-              <a:buChar char="•"/>
-            </a:pPr>
-            <a:r>
-              <a:rPr lang="ja-JP" altLang="en-US" sz="2400" dirty="0">
-                <a:solidFill>
-                  <a:srgbClr val="262626"/>
-                </a:solidFill>
-                <a:latin typeface="メイリオ" pitchFamily="34" charset="0"/>
-                <a:ea typeface="メイリオ" pitchFamily="34" charset="-122"/>
-                <a:cs typeface="メイリオ" pitchFamily="34" charset="-120"/>
-              </a:rPr>
-              <a:t>配合錠（ARB＋Ca 拮抗薬、ARNI）の</a:t>
-            </a:r>
-            <a:r>
-              <a:rPr lang="ja-JP" altLang="en-US" sz="2400" b="1" dirty="0">
-                <a:solidFill>
-                  <a:srgbClr val="D55E00"/>
-                </a:solidFill>
-                <a:latin typeface="メイリオ" pitchFamily="34" charset="0"/>
-                <a:ea typeface="メイリオ" pitchFamily="34" charset="-122"/>
-                <a:cs typeface="メイリオ" pitchFamily="34" charset="-120"/>
-              </a:rPr>
-              <a:t>中身を見落とさない</a:t>
-            </a:r>
-            <a:endParaRPr lang="ja-JP" sz="2400" dirty="0"/>
-          </a:p>
-        </p:txBody>
-      </p:sp>
-      <p:sp>
-        <p:nvSpPr>
-          <p:cNvPr id="12" name="Shape 10"/>
+          <p:cNvPr id="11" name="Shape 9"/>
           <p:cNvSpPr/>
           <p:nvPr/>
         </p:nvSpPr>
@@ -2705,7 +2447,7 @@
       </p:sp>
       <p:sp>
         <p:nvSpPr>
-          <p:cNvPr id="13" name="Text 11"/>
+          <p:cNvPr id="12" name="Text 10"/>
           <p:cNvSpPr txBox="1"/>
           <p:nvPr/>
         </p:nvSpPr>
@@ -2744,7 +2486,7 @@
       </p:sp>
       <p:sp>
         <p:nvSpPr>
-          <p:cNvPr id="14" name="Text 12"/>
+          <p:cNvPr id="13" name="Text 11"/>
           <p:cNvSpPr txBox="1"/>
           <p:nvPr/>
         </p:nvSpPr>
@@ -2776,6 +2518,264 @@
                 <a:cs typeface="メイリオ" pitchFamily="34" charset="-120"/>
               </a:rPr>
               <a:t>止めたら再開日を書く</a:t>
+            </a:r>
+            <a:endParaRPr lang="ja-JP" sz="2400" dirty="0"/>
+          </a:p>
+        </p:txBody>
+      </p:sp>
+      <p:sp>
+        <p:nvSpPr>
+          <p:cNvPr id="14" name="Text 12"/>
+          <p:cNvSpPr txBox="1"/>
+          <p:nvPr/>
+        </p:nvSpPr>
+        <p:spPr>
+          <a:xfrm>
+            <a:off x="502920" y="1691640"/>
+            <a:ext cx="11155680" cy="3118104"/>
+          </a:xfrm>
+          <a:prstGeom prst="rect">
+            <a:avLst/>
+          </a:prstGeom>
+          <a:noFill/>
+          <a:ln/>
+        </p:spPr>
+        <p:txBody>
+          <a:bodyPr wrap="square" lIns="0" tIns="0" rIns="0" bIns="0" rtlCol="0" anchor="ctr"/>
+          <a:lstStyle/>
+          <a:p>
+            <a:pPr algn="l" marL="355600" indent="-355600">
+              <a:spcAft>
+                <a:spcPts val="500"/>
+              </a:spcAft>
+              <a:buSzPct val="100000"/>
+              <a:buChar char="•"/>
+            </a:pPr>
+            <a:r>
+              <a:rPr lang="ja-JP" altLang="en-US" sz="2400" b="1" dirty="0">
+                <a:solidFill>
+                  <a:srgbClr val="0072B2"/>
+                </a:solidFill>
+                <a:latin typeface="メイリオ" pitchFamily="34" charset="0"/>
+                <a:ea typeface="メイリオ" pitchFamily="34" charset="-122"/>
+                <a:cs typeface="メイリオ" pitchFamily="34" charset="-120"/>
+              </a:rPr>
+              <a:t>国内添付文書：</a:t>
+            </a:r>
+            <a:r>
+              <a:rPr lang="ja-JP" altLang="en-US" sz="2400" dirty="0">
+                <a:solidFill>
+                  <a:srgbClr val="262626"/>
+                </a:solidFill>
+                <a:latin typeface="メイリオ" pitchFamily="34" charset="0"/>
+                <a:ea typeface="メイリオ" pitchFamily="34" charset="-122"/>
+                <a:cs typeface="メイリオ" pitchFamily="34" charset="-120"/>
+              </a:rPr>
+              <a:t>『手術前 24 時間は投与しないことが望ましい』</a:t>
+            </a:r>
+            <a:endParaRPr lang="ja-JP" sz="2400" dirty="0"/>
+          </a:p>
+          <a:p>
+            <a:pPr algn="l" marL="355600" indent="-355600">
+              <a:spcAft>
+                <a:spcPts val="500"/>
+              </a:spcAft>
+              <a:buSzPct val="100000"/>
+              <a:buChar char="•"/>
+            </a:pPr>
+            <a:r>
+              <a:rPr lang="ja-JP" altLang="en-US" sz="2400" b="1" dirty="0">
+                <a:solidFill>
+                  <a:srgbClr val="0072B2"/>
+                </a:solidFill>
+                <a:latin typeface="メイリオ" pitchFamily="34" charset="0"/>
+                <a:ea typeface="メイリオ" pitchFamily="34" charset="-122"/>
+                <a:cs typeface="メイリオ" pitchFamily="34" charset="-120"/>
+              </a:rPr>
+              <a:t>AHA/ACC 2024：</a:t>
+            </a:r>
+            <a:r>
+              <a:rPr lang="ja-JP" altLang="en-US" sz="2400" dirty="0">
+                <a:solidFill>
+                  <a:srgbClr val="262626"/>
+                </a:solidFill>
+                <a:latin typeface="メイリオ" pitchFamily="34" charset="0"/>
+                <a:ea typeface="メイリオ" pitchFamily="34" charset="-122"/>
+                <a:cs typeface="メイリオ" pitchFamily="34" charset="-120"/>
+              </a:rPr>
+              <a:t>高血圧は 24 時間前休薬を考慮（2b）</a:t>
+            </a:r>
+            <a:endParaRPr lang="ja-JP" sz="2400" dirty="0"/>
+          </a:p>
+          <a:p>
+            <a:pPr algn="l" marL="355600" indent="-355600">
+              <a:spcAft>
+                <a:spcPts val="500"/>
+              </a:spcAft>
+              <a:buSzPct val="100000"/>
+              <a:buChar char="•"/>
+            </a:pPr>
+            <a:r>
+              <a:rPr lang="ja-JP" altLang="en-US" sz="2400" b="1" dirty="0">
+                <a:solidFill>
+                  <a:srgbClr val="D55E00"/>
+                </a:solidFill>
+                <a:latin typeface="メイリオ" pitchFamily="34" charset="0"/>
+                <a:ea typeface="メイリオ" pitchFamily="34" charset="-122"/>
+                <a:cs typeface="メイリオ" pitchFamily="34" charset="-120"/>
+              </a:rPr>
+              <a:t>HFrEF は継続（2a）</a:t>
+            </a:r>
+            <a:r>
+              <a:rPr lang="ja-JP" altLang="en-US" sz="2400" dirty="0">
+                <a:solidFill>
+                  <a:srgbClr val="262626"/>
+                </a:solidFill>
+                <a:latin typeface="メイリオ" pitchFamily="34" charset="0"/>
+                <a:ea typeface="メイリオ" pitchFamily="34" charset="-122"/>
+                <a:cs typeface="メイリオ" pitchFamily="34" charset="-120"/>
+              </a:rPr>
+              <a:t>。</a:t>
+            </a:r>
+            <a:r>
+              <a:rPr lang="ja-JP" altLang="en-US" sz="2400" b="1" dirty="0">
+                <a:solidFill>
+                  <a:srgbClr val="0072B2"/>
+                </a:solidFill>
+                <a:latin typeface="メイリオ" pitchFamily="34" charset="0"/>
+                <a:ea typeface="メイリオ" pitchFamily="34" charset="-122"/>
+                <a:cs typeface="メイリオ" pitchFamily="34" charset="-120"/>
+              </a:rPr>
+              <a:t>ESC 2022：</a:t>
+            </a:r>
+            <a:r>
+              <a:rPr lang="ja-JP" altLang="en-US" sz="2400" dirty="0">
+                <a:solidFill>
+                  <a:srgbClr val="262626"/>
+                </a:solidFill>
+                <a:latin typeface="メイリオ" pitchFamily="34" charset="0"/>
+                <a:ea typeface="メイリオ" pitchFamily="34" charset="-122"/>
+                <a:cs typeface="メイリオ" pitchFamily="34" charset="-120"/>
+              </a:rPr>
+              <a:t>心不全なしは当日休薬（IIa）</a:t>
+            </a:r>
+            <a:endParaRPr lang="ja-JP" sz="2400" dirty="0"/>
+          </a:p>
+          <a:p>
+            <a:pPr algn="l" marL="355600" indent="-355600">
+              <a:spcAft>
+                <a:spcPts val="500"/>
+              </a:spcAft>
+              <a:buSzPct val="100000"/>
+              <a:buChar char="•"/>
+            </a:pPr>
+            <a:r>
+              <a:rPr lang="ja-JP" altLang="en-US" sz="2400" b="1" dirty="0">
+                <a:solidFill>
+                  <a:srgbClr val="0072B2"/>
+                </a:solidFill>
+                <a:latin typeface="メイリオ" pitchFamily="34" charset="0"/>
+                <a:ea typeface="メイリオ" pitchFamily="34" charset="-122"/>
+                <a:cs typeface="メイリオ" pitchFamily="34" charset="-120"/>
+              </a:rPr>
+              <a:t>STOP-or-NOT：</a:t>
+            </a:r>
+            <a:r>
+              <a:rPr lang="ja-JP" altLang="en-US" sz="2400" dirty="0">
+                <a:solidFill>
+                  <a:srgbClr val="262626"/>
+                </a:solidFill>
+                <a:latin typeface="メイリオ" pitchFamily="34" charset="0"/>
+                <a:ea typeface="メイリオ" pitchFamily="34" charset="-122"/>
+                <a:cs typeface="メイリオ" pitchFamily="34" charset="-120"/>
+              </a:rPr>
+              <a:t>続けても止めても死亡・合併症は </a:t>
+            </a:r>
+            <a:r>
+              <a:rPr lang="ja-JP" altLang="en-US" sz="2400" b="1" dirty="0">
+                <a:solidFill>
+                  <a:srgbClr val="D55E00"/>
+                </a:solidFill>
+                <a:latin typeface="メイリオ" pitchFamily="34" charset="0"/>
+                <a:ea typeface="メイリオ" pitchFamily="34" charset="-122"/>
+                <a:cs typeface="メイリオ" pitchFamily="34" charset="-120"/>
+              </a:rPr>
+              <a:t>22% で同じ</a:t>
+            </a:r>
+            <a:endParaRPr lang="ja-JP" sz="2400" dirty="0"/>
+          </a:p>
+          <a:p>
+            <a:pPr algn="l" marL="355600" indent="-355600">
+              <a:spcAft>
+                <a:spcPts val="500"/>
+              </a:spcAft>
+              <a:buSzPct val="100000"/>
+              <a:buChar char="•"/>
+            </a:pPr>
+            <a:r>
+              <a:rPr lang="ja-JP" altLang="en-US" sz="2400" dirty="0">
+                <a:solidFill>
+                  <a:srgbClr val="262626"/>
+                </a:solidFill>
+                <a:latin typeface="メイリオ" pitchFamily="34" charset="0"/>
+                <a:ea typeface="メイリオ" pitchFamily="34" charset="-122"/>
+                <a:cs typeface="メイリオ" pitchFamily="34" charset="-120"/>
+              </a:rPr>
+              <a:t>術中低血圧は継続 54%・休薬 41%。</a:t>
+            </a:r>
+            <a:r>
+              <a:rPr lang="ja-JP" altLang="en-US" sz="2400" b="1" dirty="0">
+                <a:solidFill>
+                  <a:srgbClr val="0072B2"/>
+                </a:solidFill>
+                <a:latin typeface="メイリオ" pitchFamily="34" charset="0"/>
+                <a:ea typeface="メイリオ" pitchFamily="34" charset="-122"/>
+                <a:cs typeface="メイリオ" pitchFamily="34" charset="-120"/>
+              </a:rPr>
+              <a:t>SPACE：</a:t>
+            </a:r>
+            <a:r>
+              <a:rPr lang="ja-JP" altLang="en-US" sz="2400" dirty="0">
+                <a:solidFill>
+                  <a:srgbClr val="262626"/>
+                </a:solidFill>
+                <a:latin typeface="メイリオ" pitchFamily="34" charset="0"/>
+                <a:ea typeface="メイリオ" pitchFamily="34" charset="-122"/>
+                <a:cs typeface="メイリオ" pitchFamily="34" charset="-120"/>
+              </a:rPr>
+              <a:t>休薬で術後高血圧が多め</a:t>
+            </a:r>
+            <a:endParaRPr lang="ja-JP" sz="2400" dirty="0"/>
+          </a:p>
+          <a:p>
+            <a:pPr algn="l" marL="355600" indent="-355600">
+              <a:spcAft>
+                <a:spcPts val="500"/>
+              </a:spcAft>
+              <a:buSzPct val="100000"/>
+              <a:buChar char="•"/>
+            </a:pPr>
+            <a:r>
+              <a:rPr lang="ja-JP" altLang="en-US" sz="2400" dirty="0">
+                <a:solidFill>
+                  <a:srgbClr val="262626"/>
+                </a:solidFill>
+                <a:latin typeface="メイリオ" pitchFamily="34" charset="0"/>
+                <a:ea typeface="メイリオ" pitchFamily="34" charset="-122"/>
+                <a:cs typeface="メイリオ" pitchFamily="34" charset="-120"/>
+              </a:rPr>
+              <a:t>配合錠（ARB＋Ca 拮抗薬、ARNI）の</a:t>
+            </a:r>
+            <a:r>
+              <a:rPr lang="ja-JP" altLang="en-US" sz="2400" b="1" dirty="0">
+                <a:solidFill>
+                  <a:srgbClr val="D55E00"/>
+                </a:solidFill>
+                <a:latin typeface="メイリオ" pitchFamily="34" charset="0"/>
+                <a:ea typeface="メイリオ" pitchFamily="34" charset="-122"/>
+                <a:cs typeface="メイリオ" pitchFamily="34" charset="-120"/>
+              </a:rPr>
+              <a:t>中身を見落とさない</a:t>
             </a:r>
             <a:endParaRPr lang="ja-JP" sz="2400" dirty="0"/>
           </a:p>
@@ -3244,9 +3244,9 @@
             <a:tbl>
               <a:tblPr/>
               <a:tblGrid>
-                <a:gridCol w="1717243"/>
-                <a:gridCol w="1892808"/>
-                <a:gridCol w="7545629"/>
+                <a:gridCol w="1666951"/>
+                <a:gridCol w="2014423"/>
+                <a:gridCol w="7474306"/>
               </a:tblGrid>
               <a:tr h="411480">
                 <a:tc>
@@ -3278,7 +3278,7 @@
                       </a:endParaRPr>
                     </a:p>
                   </a:txBody>
-                  <a:tcPr marL="76200" marR="76200" marT="38100" marB="38100" anchor="ctr">
+                  <a:tcPr marL="50800" marR="50800" marT="38100" marB="38100" anchor="ctr">
                     <a:lnL w="12700" cap="flat" cmpd="sng" algn="ctr">
                       <a:solidFill>
                         <a:srgbClr val="BFBFBF"/>
@@ -3349,7 +3349,7 @@
                       </a:endParaRPr>
                     </a:p>
                   </a:txBody>
-                  <a:tcPr marL="76200" marR="76200" marT="38100" marB="38100" anchor="ctr">
+                  <a:tcPr marL="50800" marR="50800" marT="38100" marB="38100" anchor="ctr">
                     <a:lnL w="12700" cap="flat" cmpd="sng" algn="ctr">
                       <a:solidFill>
                         <a:srgbClr val="BFBFBF"/>
@@ -3420,7 +3420,7 @@
                       </a:endParaRPr>
                     </a:p>
                   </a:txBody>
-                  <a:tcPr marL="76200" marR="76200" marT="38100" marB="38100" anchor="ctr">
+                  <a:tcPr marL="50800" marR="50800" marT="38100" marB="38100" anchor="ctr">
                     <a:lnL w="12700" cap="flat" cmpd="sng" algn="ctr">
                       <a:solidFill>
                         <a:srgbClr val="BFBFBF"/>
@@ -3493,7 +3493,7 @@
                       </a:endParaRPr>
                     </a:p>
                   </a:txBody>
-                  <a:tcPr marL="76200" marR="76200" marT="38100" marB="38100" anchor="ctr">
+                  <a:tcPr marL="50800" marR="50800" marT="38100" marB="38100" anchor="ctr">
                     <a:lnL w="12700" cap="flat" cmpd="sng" algn="ctr">
                       <a:solidFill>
                         <a:srgbClr val="BFBFBF"/>
@@ -3561,7 +3561,7 @@
                       </a:endParaRPr>
                     </a:p>
                   </a:txBody>
-                  <a:tcPr marL="76200" marR="76200" marT="38100" marB="38100" anchor="ctr">
+                  <a:tcPr marL="50800" marR="50800" marT="38100" marB="38100" anchor="ctr">
                     <a:lnL w="12700" cap="flat" cmpd="sng" algn="ctr">
                       <a:solidFill>
                         <a:srgbClr val="BFBFBF"/>
@@ -3677,7 +3677,7 @@
                       </a:endParaRPr>
                     </a:p>
                   </a:txBody>
-                  <a:tcPr marL="76200" marR="76200" marT="38100" marB="38100" anchor="ctr">
+                  <a:tcPr marL="50800" marR="50800" marT="38100" marB="38100" anchor="ctr">
                     <a:lnL w="12700" cap="flat" cmpd="sng" algn="ctr">
                       <a:solidFill>
                         <a:srgbClr val="BFBFBF"/>
@@ -3747,7 +3747,7 @@
                       </a:endParaRPr>
                     </a:p>
                   </a:txBody>
-                  <a:tcPr marL="76200" marR="76200" marT="38100" marB="38100" anchor="ctr">
+                  <a:tcPr marL="50800" marR="50800" marT="38100" marB="38100" anchor="ctr">
                     <a:lnL w="12700" cap="flat" cmpd="sng" algn="ctr">
                       <a:solidFill>
                         <a:srgbClr val="BFBFBF"/>
@@ -3815,7 +3815,7 @@
                       </a:endParaRPr>
                     </a:p>
                   </a:txBody>
-                  <a:tcPr marL="76200" marR="76200" marT="38100" marB="38100" anchor="ctr">
+                  <a:tcPr marL="50800" marR="50800" marT="38100" marB="38100" anchor="ctr">
                     <a:lnL w="12700" cap="flat" cmpd="sng" algn="ctr">
                       <a:solidFill>
                         <a:srgbClr val="BFBFBF"/>
@@ -3883,7 +3883,7 @@
                       </a:endParaRPr>
                     </a:p>
                   </a:txBody>
-                  <a:tcPr marL="76200" marR="76200" marT="38100" marB="38100" anchor="ctr">
+                  <a:tcPr marL="50800" marR="50800" marT="38100" marB="38100" anchor="ctr">
                     <a:lnL w="12700" cap="flat" cmpd="sng" algn="ctr">
                       <a:solidFill>
                         <a:srgbClr val="BFBFBF"/>
@@ -3953,7 +3953,7 @@
                       </a:endParaRPr>
                     </a:p>
                   </a:txBody>
-                  <a:tcPr marL="76200" marR="76200" marT="38100" marB="38100" anchor="ctr">
+                  <a:tcPr marL="50800" marR="50800" marT="38100" marB="38100" anchor="ctr">
                     <a:lnL w="12700" cap="flat" cmpd="sng" algn="ctr">
                       <a:solidFill>
                         <a:srgbClr val="BFBFBF"/>
@@ -4012,7 +4012,7 @@
                           <a:ea typeface="メイリオ" pitchFamily="34" charset="-122"/>
                           <a:cs typeface="メイリオ" pitchFamily="34" charset="-120"/>
                         </a:rPr>
-                        <a:t>当日は休薬</a:t>
+                        <a:t>当日は休薬が</a:t>
                       </a:r>
                       <a:endParaRPr lang="en-US" sz="2200" dirty="0">
                         <a:latin typeface="メイリオ" charset="0"/>
@@ -4036,7 +4036,7 @@
                           <a:ea typeface="メイリオ" pitchFamily="34" charset="-122"/>
                           <a:cs typeface="メイリオ" pitchFamily="34" charset="-120"/>
                         </a:rPr>
-                        <a:t>が一般的</a:t>
+                        <a:t>一般的</a:t>
                       </a:r>
                       <a:endParaRPr lang="en-US" sz="2200" dirty="0">
                         <a:latin typeface="メイリオ" charset="0"/>
@@ -4045,7 +4045,7 @@
                       </a:endParaRPr>
                     </a:p>
                   </a:txBody>
-                  <a:tcPr marL="76200" marR="76200" marT="38100" marB="38100" anchor="ctr">
+                  <a:tcPr marL="50800" marR="50800" marT="38100" marB="38100" anchor="ctr">
                     <a:lnL w="12700" cap="flat" cmpd="sng" algn="ctr">
                       <a:solidFill>
                         <a:srgbClr val="BFBFBF"/>
@@ -4137,7 +4137,7 @@
                       </a:endParaRPr>
                     </a:p>
                   </a:txBody>
-                  <a:tcPr marL="76200" marR="76200" marT="38100" marB="38100" anchor="ctr">
+                  <a:tcPr marL="50800" marR="50800" marT="38100" marB="38100" anchor="ctr">
                     <a:lnL w="12700" cap="flat" cmpd="sng" algn="ctr">
                       <a:solidFill>
                         <a:srgbClr val="BFBFBF"/>
@@ -4207,7 +4207,7 @@
                       </a:endParaRPr>
                     </a:p>
                   </a:txBody>
-                  <a:tcPr marL="76200" marR="76200" marT="38100" marB="38100" anchor="ctr">
+                  <a:tcPr marL="50800" marR="50800" marT="38100" marB="38100" anchor="ctr">
                     <a:lnL w="12700" cap="flat" cmpd="sng" algn="ctr">
                       <a:solidFill>
                         <a:srgbClr val="BFBFBF"/>
@@ -4275,7 +4275,7 @@
                       </a:endParaRPr>
                     </a:p>
                   </a:txBody>
-                  <a:tcPr marL="76200" marR="76200" marT="38100" marB="38100" anchor="ctr">
+                  <a:tcPr marL="50800" marR="50800" marT="38100" marB="38100" anchor="ctr">
                     <a:lnL w="12700" cap="flat" cmpd="sng" algn="ctr">
                       <a:solidFill>
                         <a:srgbClr val="BFBFBF"/>
@@ -4343,7 +4343,7 @@
                       </a:endParaRPr>
                     </a:p>
                   </a:txBody>
-                  <a:tcPr marL="76200" marR="76200" marT="38100" marB="38100" anchor="ctr">
+                  <a:tcPr marL="50800" marR="50800" marT="38100" marB="38100" anchor="ctr">
                     <a:lnL w="12700" cap="flat" cmpd="sng" algn="ctr">
                       <a:solidFill>
                         <a:srgbClr val="BFBFBF"/>
@@ -4413,7 +4413,7 @@
                       </a:endParaRPr>
                     </a:p>
                   </a:txBody>
-                  <a:tcPr marL="76200" marR="76200" marT="38100" marB="38100" anchor="ctr">
+                  <a:tcPr marL="50800" marR="50800" marT="38100" marB="38100" anchor="ctr">
                     <a:lnL w="12700" cap="flat" cmpd="sng" algn="ctr">
                       <a:solidFill>
                         <a:srgbClr val="BFBFBF"/>
@@ -4529,7 +4529,7 @@
                       </a:endParaRPr>
                     </a:p>
                   </a:txBody>
-                  <a:tcPr marL="76200" marR="76200" marT="38100" marB="38100" anchor="ctr">
+                  <a:tcPr marL="50800" marR="50800" marT="38100" marB="38100" anchor="ctr">
                     <a:lnL w="12700" cap="flat" cmpd="sng" algn="ctr">
                       <a:solidFill>
                         <a:srgbClr val="BFBFBF"/>
@@ -4645,7 +4645,7 @@
                       </a:endParaRPr>
                     </a:p>
                   </a:txBody>
-                  <a:tcPr marL="76200" marR="76200" marT="38100" marB="38100" anchor="ctr">
+                  <a:tcPr marL="50800" marR="50800" marT="38100" marB="38100" anchor="ctr">
                     <a:lnL w="12700" cap="flat" cmpd="sng" algn="ctr">
                       <a:solidFill>
                         <a:srgbClr val="BFBFBF"/>
@@ -5265,7 +5265,7 @@
         <p:spPr>
           <a:xfrm>
             <a:off x="502920" y="1664208"/>
-            <a:ext cx="4100170" cy="3145536"/>
+            <a:ext cx="4295851" cy="3145536"/>
           </a:xfrm>
           <a:prstGeom prst="roundRect">
             <a:avLst>
@@ -5287,7 +5287,7 @@
         <p:spPr>
           <a:xfrm>
             <a:off x="594360" y="1737360"/>
-            <a:ext cx="3917290" cy="420624"/>
+            <a:ext cx="4112971" cy="420624"/>
           </a:xfrm>
           <a:prstGeom prst="rect">
             <a:avLst/>
@@ -5365,7 +5365,7 @@
         <p:spPr>
           <a:xfrm>
             <a:off x="850392" y="2157984"/>
-            <a:ext cx="3661258" cy="374904"/>
+            <a:ext cx="3856939" cy="374904"/>
           </a:xfrm>
           <a:prstGeom prst="rect">
             <a:avLst/>
@@ -5404,7 +5404,7 @@
         <p:spPr>
           <a:xfrm>
             <a:off x="850392" y="2493569"/>
-            <a:ext cx="3661258" cy="374904"/>
+            <a:ext cx="3856939" cy="374904"/>
           </a:xfrm>
           <a:prstGeom prst="rect">
             <a:avLst/>
@@ -5442,7 +5442,7 @@
         </p:nvSpPr>
         <p:spPr>
           <a:xfrm>
-            <a:off x="594360" y="2943454"/>
+            <a:off x="594360" y="3011119"/>
             <a:ext cx="320040" cy="374904"/>
           </a:xfrm>
           <a:prstGeom prst="rect">
@@ -5481,8 +5481,8 @@
         </p:nvSpPr>
         <p:spPr>
           <a:xfrm>
-            <a:off x="850392" y="2943454"/>
-            <a:ext cx="3661258" cy="374904"/>
+            <a:off x="850392" y="3011119"/>
+            <a:ext cx="3856939" cy="374904"/>
           </a:xfrm>
           <a:prstGeom prst="rect">
             <a:avLst/>
@@ -5520,8 +5520,8 @@
         </p:nvSpPr>
         <p:spPr>
           <a:xfrm>
-            <a:off x="850392" y="3279038"/>
-            <a:ext cx="3661258" cy="374904"/>
+            <a:off x="850392" y="3346704"/>
+            <a:ext cx="3856939" cy="374904"/>
           </a:xfrm>
           <a:prstGeom prst="rect">
             <a:avLst/>
@@ -5559,7 +5559,7 @@
         </p:nvSpPr>
         <p:spPr>
           <a:xfrm>
-            <a:off x="594360" y="3729838"/>
+            <a:off x="594360" y="3865169"/>
             <a:ext cx="320040" cy="374904"/>
           </a:xfrm>
           <a:prstGeom prst="rect">
@@ -5598,8 +5598,8 @@
         </p:nvSpPr>
         <p:spPr>
           <a:xfrm>
-            <a:off x="850392" y="3729838"/>
-            <a:ext cx="3661258" cy="374904"/>
+            <a:off x="850392" y="3865169"/>
+            <a:ext cx="3856939" cy="374904"/>
           </a:xfrm>
           <a:prstGeom prst="rect">
             <a:avLst/>
@@ -5623,7 +5623,7 @@
                 <a:ea typeface="メイリオ" pitchFamily="34" charset="-122"/>
                 <a:cs typeface="メイリオ" pitchFamily="34" charset="-120"/>
               </a:rPr>
-              <a:t>過去 6 か月に経口</a:t>
+              <a:t>過去 6 か月に経口 2 週超・</a:t>
             </a:r>
             <a:endParaRPr lang="ja-JP" sz="2200" dirty="0"/>
           </a:p>
@@ -5637,8 +5637,8 @@
         </p:nvSpPr>
         <p:spPr>
           <a:xfrm>
-            <a:off x="850392" y="4064508"/>
-            <a:ext cx="3661258" cy="374904"/>
+            <a:off x="850392" y="4199839"/>
+            <a:ext cx="3856939" cy="374904"/>
           </a:xfrm>
           <a:prstGeom prst="rect">
             <a:avLst/>
@@ -5662,7 +5662,7 @@
                 <a:ea typeface="メイリオ" pitchFamily="34" charset="-122"/>
                 <a:cs typeface="メイリオ" pitchFamily="34" charset="-120"/>
               </a:rPr>
-              <a:t>2 週超・長期の高用量</a:t>
+              <a:t>長期の高用量 ICS（GINA）</a:t>
             </a:r>
             <a:endParaRPr lang="ja-JP" sz="2200" dirty="0"/>
           </a:p>
@@ -5670,53 +5670,14 @@
       </p:sp>
       <p:sp>
         <p:nvSpPr>
-          <p:cNvPr id="25" name="Text 23"/>
-          <p:cNvSpPr txBox="1"/>
+          <p:cNvPr id="25" name="Shape 23"/>
+          <p:cNvSpPr/>
           <p:nvPr/>
         </p:nvSpPr>
         <p:spPr>
           <a:xfrm>
-            <a:off x="850392" y="4400093"/>
-            <a:ext cx="3661258" cy="374904"/>
-          </a:xfrm>
-          <a:prstGeom prst="rect">
-            <a:avLst/>
-          </a:prstGeom>
-          <a:noFill/>
-          <a:ln/>
-        </p:spPr>
-        <p:txBody>
-          <a:bodyPr wrap="square" lIns="0" tIns="0" rIns="0" bIns="0" rtlCol="0" anchor="t"/>
-          <a:lstStyle/>
-          <a:p>
-            <a:pPr algn="l" indent="0" marL="0">
-              <a:buNone/>
-            </a:pPr>
-            <a:r>
-              <a:rPr lang="ja-JP" altLang="en-US" sz="2200" dirty="0">
-                <a:solidFill>
-                  <a:srgbClr val="262626"/>
-                </a:solidFill>
-                <a:latin typeface="メイリオ" pitchFamily="34" charset="0"/>
-                <a:ea typeface="メイリオ" pitchFamily="34" charset="-122"/>
-                <a:cs typeface="メイリオ" pitchFamily="34" charset="-120"/>
-              </a:rPr>
-              <a:t>ICS（GINA）</a:t>
-            </a:r>
-            <a:endParaRPr lang="ja-JP" sz="2200" dirty="0"/>
-          </a:p>
-        </p:txBody>
-      </p:sp>
-      <p:sp>
-        <p:nvSpPr>
-          <p:cNvPr id="26" name="Shape 24"/>
-          <p:cNvSpPr/>
-          <p:nvPr/>
-        </p:nvSpPr>
-        <p:spPr>
-          <a:xfrm>
-            <a:off x="4822546" y="1664208"/>
-            <a:ext cx="6863486" cy="3145536"/>
+            <a:off x="5018227" y="1664208"/>
+            <a:ext cx="6667805" cy="3145536"/>
           </a:xfrm>
           <a:prstGeom prst="roundRect">
             <a:avLst>
@@ -5731,14 +5692,14 @@
       </p:sp>
       <p:sp>
         <p:nvSpPr>
-          <p:cNvPr id="27" name="Text 25"/>
+          <p:cNvPr id="26" name="Text 24"/>
           <p:cNvSpPr txBox="1"/>
           <p:nvPr/>
         </p:nvSpPr>
         <p:spPr>
           <a:xfrm>
-            <a:off x="4913986" y="1737360"/>
-            <a:ext cx="6680606" cy="420624"/>
+            <a:off x="5109667" y="1737360"/>
+            <a:ext cx="6484925" cy="420624"/>
           </a:xfrm>
           <a:prstGeom prst="rect">
             <a:avLst/>
@@ -5770,13 +5731,13 @@
       </p:sp>
       <p:sp>
         <p:nvSpPr>
-          <p:cNvPr id="28" name="Text 26"/>
+          <p:cNvPr id="27" name="Text 25"/>
           <p:cNvSpPr txBox="1"/>
           <p:nvPr/>
         </p:nvSpPr>
         <p:spPr>
           <a:xfrm>
-            <a:off x="4913986" y="2157984"/>
+            <a:off x="5109667" y="2157984"/>
             <a:ext cx="320040" cy="374904"/>
           </a:xfrm>
           <a:prstGeom prst="rect">
@@ -5809,14 +5770,14 @@
       </p:sp>
       <p:sp>
         <p:nvSpPr>
-          <p:cNvPr id="29" name="Text 27"/>
+          <p:cNvPr id="28" name="Text 26"/>
           <p:cNvSpPr txBox="1"/>
           <p:nvPr/>
         </p:nvSpPr>
         <p:spPr>
           <a:xfrm>
-            <a:off x="5170018" y="2157984"/>
-            <a:ext cx="6424574" cy="374904"/>
+            <a:off x="5365699" y="2157984"/>
+            <a:ext cx="6228893" cy="374904"/>
           </a:xfrm>
           <a:prstGeom prst="rect">
             <a:avLst/>
@@ -5848,14 +5809,14 @@
       </p:sp>
       <p:sp>
         <p:nvSpPr>
-          <p:cNvPr id="30" name="Text 28"/>
+          <p:cNvPr id="29" name="Text 27"/>
           <p:cNvSpPr txBox="1"/>
           <p:nvPr/>
         </p:nvSpPr>
         <p:spPr>
           <a:xfrm>
-            <a:off x="5170018" y="2493569"/>
-            <a:ext cx="6424574" cy="374904"/>
+            <a:off x="5365699" y="2493569"/>
+            <a:ext cx="6228893" cy="374904"/>
           </a:xfrm>
           <a:prstGeom prst="rect">
             <a:avLst/>
@@ -5898,13 +5859,13 @@
       </p:sp>
       <p:sp>
         <p:nvSpPr>
-          <p:cNvPr id="31" name="Text 29"/>
+          <p:cNvPr id="30" name="Text 28"/>
           <p:cNvSpPr txBox="1"/>
           <p:nvPr/>
         </p:nvSpPr>
         <p:spPr>
           <a:xfrm>
-            <a:off x="4913986" y="2905049"/>
+            <a:off x="5109667" y="2884018"/>
             <a:ext cx="320040" cy="374904"/>
           </a:xfrm>
           <a:prstGeom prst="rect">
@@ -5937,14 +5898,14 @@
       </p:sp>
       <p:sp>
         <p:nvSpPr>
-          <p:cNvPr id="32" name="Text 30"/>
+          <p:cNvPr id="31" name="Text 29"/>
           <p:cNvSpPr txBox="1"/>
           <p:nvPr/>
         </p:nvSpPr>
         <p:spPr>
           <a:xfrm>
-            <a:off x="5170018" y="2905049"/>
-            <a:ext cx="6424574" cy="374904"/>
+            <a:off x="5365699" y="2884018"/>
+            <a:ext cx="6228893" cy="374904"/>
           </a:xfrm>
           <a:prstGeom prst="rect">
             <a:avLst/>
@@ -5976,13 +5937,13 @@
       </p:sp>
       <p:sp>
         <p:nvSpPr>
-          <p:cNvPr id="33" name="Text 31"/>
+          <p:cNvPr id="32" name="Text 30"/>
           <p:cNvSpPr txBox="1"/>
           <p:nvPr/>
         </p:nvSpPr>
         <p:spPr>
           <a:xfrm>
-            <a:off x="4913986" y="3317443"/>
+            <a:off x="5109667" y="3275381"/>
             <a:ext cx="320040" cy="374904"/>
           </a:xfrm>
           <a:prstGeom prst="rect">
@@ -6015,14 +5976,14 @@
       </p:sp>
       <p:sp>
         <p:nvSpPr>
-          <p:cNvPr id="34" name="Text 32"/>
+          <p:cNvPr id="33" name="Text 31"/>
           <p:cNvSpPr txBox="1"/>
           <p:nvPr/>
         </p:nvSpPr>
         <p:spPr>
           <a:xfrm>
-            <a:off x="5170018" y="3317443"/>
-            <a:ext cx="6424574" cy="374904"/>
+            <a:off x="5365699" y="3275381"/>
+            <a:ext cx="6228893" cy="374904"/>
           </a:xfrm>
           <a:prstGeom prst="rect">
             <a:avLst/>
@@ -6046,7 +6007,7 @@
                 <a:ea typeface="メイリオ" pitchFamily="34" charset="-122"/>
                 <a:cs typeface="メイリオ" pitchFamily="34" charset="-120"/>
               </a:rPr>
-              <a:t>続いて 200 mg/24 時間を持続。食べられたら</a:t>
+              <a:t>続いて 200 mg/24 時間を持続。</a:t>
             </a:r>
             <a:endParaRPr lang="ja-JP" sz="2200" dirty="0"/>
           </a:p>
@@ -6054,14 +6015,14 @@
       </p:sp>
       <p:sp>
         <p:nvSpPr>
-          <p:cNvPr id="35" name="Text 33"/>
+          <p:cNvPr id="34" name="Text 32"/>
           <p:cNvSpPr txBox="1"/>
           <p:nvPr/>
         </p:nvSpPr>
         <p:spPr>
           <a:xfrm>
-            <a:off x="5170018" y="3653028"/>
-            <a:ext cx="6424574" cy="374904"/>
+            <a:off x="5365699" y="3610966"/>
+            <a:ext cx="6228893" cy="374904"/>
           </a:xfrm>
           <a:prstGeom prst="rect">
             <a:avLst/>
@@ -6085,7 +6046,7 @@
                 <a:ea typeface="メイリオ" pitchFamily="34" charset="-122"/>
                 <a:cs typeface="メイリオ" pitchFamily="34" charset="-120"/>
               </a:rPr>
-              <a:t>通常量の 2 倍を 48 時間経口で</a:t>
+              <a:t>食べられたら通常量の 2 倍を 48 時間経口で</a:t>
             </a:r>
             <a:endParaRPr lang="ja-JP" sz="2200" dirty="0"/>
           </a:p>
@@ -6093,13 +6054,13 @@
       </p:sp>
       <p:sp>
         <p:nvSpPr>
-          <p:cNvPr id="36" name="Text 34"/>
+          <p:cNvPr id="35" name="Text 33"/>
           <p:cNvSpPr txBox="1"/>
           <p:nvPr/>
         </p:nvSpPr>
         <p:spPr>
           <a:xfrm>
-            <a:off x="4913986" y="4064508"/>
+            <a:off x="5109667" y="4001414"/>
             <a:ext cx="320040" cy="374904"/>
           </a:xfrm>
           <a:prstGeom prst="rect">
@@ -6132,14 +6093,14 @@
       </p:sp>
       <p:sp>
         <p:nvSpPr>
-          <p:cNvPr id="37" name="Text 35"/>
+          <p:cNvPr id="36" name="Text 34"/>
           <p:cNvSpPr txBox="1"/>
           <p:nvPr/>
         </p:nvSpPr>
         <p:spPr>
           <a:xfrm>
-            <a:off x="5170018" y="4064508"/>
-            <a:ext cx="6424574" cy="374904"/>
+            <a:off x="5365699" y="4001414"/>
+            <a:ext cx="6228893" cy="374904"/>
           </a:xfrm>
           <a:prstGeom prst="rect">
             <a:avLst/>
@@ -6171,14 +6132,14 @@
       </p:sp>
       <p:sp>
         <p:nvSpPr>
-          <p:cNvPr id="38" name="Text 36"/>
+          <p:cNvPr id="37" name="Text 35"/>
           <p:cNvSpPr txBox="1"/>
           <p:nvPr/>
         </p:nvSpPr>
         <p:spPr>
           <a:xfrm>
-            <a:off x="5170018" y="4400093"/>
-            <a:ext cx="6424574" cy="374904"/>
+            <a:off x="5365699" y="4336999"/>
+            <a:ext cx="6228893" cy="374904"/>
           </a:xfrm>
           <a:prstGeom prst="rect">
             <a:avLst/>
@@ -6671,11 +6632,11 @@
             <a:tbl>
               <a:tblPr/>
               <a:tblGrid>
-                <a:gridCol w="2328977"/>
-                <a:gridCol w="3054096"/>
-                <a:gridCol w="5772607"/>
+                <a:gridCol w="2551176"/>
+                <a:gridCol w="3118104"/>
+                <a:gridCol w="5486400"/>
               </a:tblGrid>
-              <a:tr h="292608">
+              <a:tr h="320040">
                 <a:tc>
                   <a:txBody>
                     <a:bodyPr/>
@@ -6683,12 +6644,12 @@
                     <a:p>
                       <a:pPr algn="l" indent="0" marL="0">
                         <a:lnSpc>
-                          <a:spcPts val="2040"/>
+                          <a:spcPts val="1920"/>
                         </a:lnSpc>
                         <a:buNone/>
                       </a:pPr>
                       <a:r>
-                        <a:rPr lang="ja-JP" altLang="en-US" sz="1700" b="1" dirty="0">
+                        <a:rPr lang="ja-JP" altLang="en-US" sz="1600" b="1" dirty="0">
                           <a:solidFill>
                             <a:srgbClr val="262626"/>
                           </a:solidFill>
@@ -6698,14 +6659,14 @@
                         </a:rPr>
                         <a:t>薬</a:t>
                       </a:r>
-                      <a:endParaRPr lang="en-US" sz="1700" dirty="0">
+                      <a:endParaRPr lang="en-US" sz="1600" dirty="0">
                         <a:latin typeface="メイリオ" charset="0"/>
                         <a:ea typeface="メイリオ" charset="0"/>
                         <a:cs typeface="メイリオ" charset="0"/>
                       </a:endParaRPr>
                     </a:p>
                   </a:txBody>
-                  <a:tcPr marL="76200" marR="76200" marT="12700" marB="12700" anchor="ctr">
+                  <a:tcPr marL="76200" marR="76200" marT="38100" marB="38100" anchor="ctr">
                     <a:lnL w="12700" cap="flat" cmpd="sng" algn="ctr">
                       <a:solidFill>
                         <a:srgbClr val="BFBFBF"/>
@@ -6754,12 +6715,12 @@
                     <a:p>
                       <a:pPr algn="l" indent="0" marL="0">
                         <a:lnSpc>
-                          <a:spcPts val="2040"/>
+                          <a:spcPts val="1920"/>
                         </a:lnSpc>
                         <a:buNone/>
                       </a:pPr>
                       <a:r>
-                        <a:rPr lang="ja-JP" altLang="en-US" sz="1700" b="1" dirty="0">
+                        <a:rPr lang="ja-JP" altLang="en-US" sz="1600" b="1" dirty="0">
                           <a:solidFill>
                             <a:srgbClr val="262626"/>
                           </a:solidFill>
@@ -6769,14 +6730,14 @@
                         </a:rPr>
                         <a:t>当日</a:t>
                       </a:r>
-                      <a:endParaRPr lang="en-US" sz="1700" dirty="0">
+                      <a:endParaRPr lang="en-US" sz="1600" dirty="0">
                         <a:latin typeface="メイリオ" charset="0"/>
                         <a:ea typeface="メイリオ" charset="0"/>
                         <a:cs typeface="メイリオ" charset="0"/>
                       </a:endParaRPr>
                     </a:p>
                   </a:txBody>
-                  <a:tcPr marL="76200" marR="76200" marT="12700" marB="12700" anchor="ctr">
+                  <a:tcPr marL="76200" marR="76200" marT="38100" marB="38100" anchor="ctr">
                     <a:lnL w="12700" cap="flat" cmpd="sng" algn="ctr">
                       <a:solidFill>
                         <a:srgbClr val="BFBFBF"/>
@@ -6825,12 +6786,12 @@
                     <a:p>
                       <a:pPr algn="l" indent="0" marL="0">
                         <a:lnSpc>
-                          <a:spcPts val="2040"/>
+                          <a:spcPts val="1920"/>
                         </a:lnSpc>
                         <a:buNone/>
                       </a:pPr>
                       <a:r>
-                        <a:rPr lang="ja-JP" altLang="en-US" sz="1700" b="1" dirty="0">
+                        <a:rPr lang="ja-JP" altLang="en-US" sz="1600" b="1" dirty="0">
                           <a:solidFill>
                             <a:srgbClr val="262626"/>
                           </a:solidFill>
@@ -6840,14 +6801,14 @@
                         </a:rPr>
                         <a:t>注意</a:t>
                       </a:r>
-                      <a:endParaRPr lang="en-US" sz="1700" dirty="0">
+                      <a:endParaRPr lang="en-US" sz="1600" dirty="0">
                         <a:latin typeface="メイリオ" charset="0"/>
                         <a:ea typeface="メイリオ" charset="0"/>
                         <a:cs typeface="メイリオ" charset="0"/>
                       </a:endParaRPr>
                     </a:p>
                   </a:txBody>
-                  <a:tcPr marL="76200" marR="76200" marT="12700" marB="12700" anchor="ctr">
+                  <a:tcPr marL="76200" marR="76200" marT="38100" marB="38100" anchor="ctr">
                     <a:lnL w="12700" cap="flat" cmpd="sng" algn="ctr">
                       <a:solidFill>
                         <a:srgbClr val="BFBFBF"/>
@@ -6890,7 +6851,7 @@
                   </a:tcPr>
                 </a:tc>
               </a:tr>
-              <a:tr h="548640">
+              <a:tr h="566928">
                 <a:tc>
                   <a:txBody>
                     <a:bodyPr/>
@@ -6898,12 +6859,12 @@
                     <a:p>
                       <a:pPr algn="l" indent="0" marL="0">
                         <a:lnSpc>
-                          <a:spcPts val="2040"/>
+                          <a:spcPts val="1920"/>
                         </a:lnSpc>
                         <a:buNone/>
                       </a:pPr>
                       <a:r>
-                        <a:rPr lang="ja-JP" altLang="en-US" sz="1700" b="1" dirty="0">
+                        <a:rPr lang="ja-JP" altLang="en-US" sz="1600" b="1" dirty="0">
                           <a:solidFill>
                             <a:srgbClr val="262626"/>
                           </a:solidFill>
@@ -6913,14 +6874,14 @@
                         </a:rPr>
                         <a:t>抗てんかん薬</a:t>
                       </a:r>
-                      <a:endParaRPr lang="en-US" sz="1700" dirty="0">
+                      <a:endParaRPr lang="en-US" sz="1600" dirty="0">
                         <a:latin typeface="メイリオ" charset="0"/>
                         <a:ea typeface="メイリオ" charset="0"/>
                         <a:cs typeface="メイリオ" charset="0"/>
                       </a:endParaRPr>
                     </a:p>
                   </a:txBody>
-                  <a:tcPr marL="76200" marR="76200" marT="12700" marB="12700" anchor="ctr">
+                  <a:tcPr marL="76200" marR="76200" marT="38100" marB="38100" anchor="ctr">
                     <a:lnL w="12700" cap="flat" cmpd="sng" algn="ctr">
                       <a:solidFill>
                         <a:srgbClr val="BFBFBF"/>
@@ -6966,12 +6927,12 @@
                     <a:p>
                       <a:pPr algn="l" indent="0" marL="0">
                         <a:lnSpc>
-                          <a:spcPts val="2040"/>
+                          <a:spcPts val="1920"/>
                         </a:lnSpc>
                         <a:buNone/>
                       </a:pPr>
                       <a:r>
-                        <a:rPr lang="ja-JP" altLang="en-US" sz="1700" b="1" dirty="0">
+                        <a:rPr lang="ja-JP" altLang="en-US" sz="1600" b="1" dirty="0">
                           <a:solidFill>
                             <a:srgbClr val="0072B2"/>
                           </a:solidFill>
@@ -6981,14 +6942,14 @@
                         </a:rPr>
                         <a:t>続ける</a:t>
                       </a:r>
-                      <a:endParaRPr lang="en-US" sz="1700" dirty="0">
+                      <a:endParaRPr lang="en-US" sz="1600" dirty="0">
                         <a:latin typeface="メイリオ" charset="0"/>
                         <a:ea typeface="メイリオ" charset="0"/>
                         <a:cs typeface="メイリオ" charset="0"/>
                       </a:endParaRPr>
                     </a:p>
                   </a:txBody>
-                  <a:tcPr marL="76200" marR="76200" marT="12700" marB="12700" anchor="ctr">
+                  <a:tcPr marL="76200" marR="76200" marT="38100" marB="38100" anchor="ctr">
                     <a:lnL w="12700" cap="flat" cmpd="sng" algn="ctr">
                       <a:solidFill>
                         <a:srgbClr val="BFBFBF"/>
@@ -7034,12 +6995,12 @@
                     <a:p>
                       <a:pPr algn="l" indent="0" marL="0">
                         <a:lnSpc>
-                          <a:spcPts val="2040"/>
+                          <a:spcPts val="1920"/>
                         </a:lnSpc>
                         <a:buNone/>
                       </a:pPr>
                       <a:r>
-                        <a:rPr lang="ja-JP" altLang="en-US" sz="1700" dirty="0">
+                        <a:rPr lang="ja-JP" altLang="en-US" sz="1600" dirty="0">
                           <a:solidFill>
                             <a:srgbClr val="262626"/>
                           </a:solidFill>
@@ -7049,7 +7010,7 @@
                         </a:rPr>
                         <a:t>絶食が長引けば静注製剤に。</a:t>
                       </a:r>
-                      <a:endParaRPr lang="en-US" sz="1700" dirty="0">
+                      <a:endParaRPr lang="en-US" sz="1600" dirty="0">
                         <a:latin typeface="メイリオ" charset="0"/>
                         <a:ea typeface="メイリオ" charset="0"/>
                         <a:cs typeface="メイリオ" charset="0"/>
@@ -7058,12 +7019,12 @@
                     <a:p>
                       <a:pPr algn="l" indent="0" marL="0">
                         <a:lnSpc>
-                          <a:spcPts val="2040"/>
+                          <a:spcPts val="1920"/>
                         </a:lnSpc>
                         <a:buNone/>
                       </a:pPr>
                       <a:r>
-                        <a:rPr lang="ja-JP" altLang="en-US" sz="1700" dirty="0">
+                        <a:rPr lang="ja-JP" altLang="en-US" sz="1600" dirty="0">
                           <a:solidFill>
                             <a:srgbClr val="262626"/>
                           </a:solidFill>
@@ -7073,14 +7034,14 @@
                         </a:rPr>
                         <a:t>バルプロ酸とカルバペネムは併用禁忌</a:t>
                       </a:r>
-                      <a:endParaRPr lang="en-US" sz="1700" dirty="0">
+                      <a:endParaRPr lang="en-US" sz="1600" dirty="0">
                         <a:latin typeface="メイリオ" charset="0"/>
                         <a:ea typeface="メイリオ" charset="0"/>
                         <a:cs typeface="メイリオ" charset="0"/>
                       </a:endParaRPr>
                     </a:p>
                   </a:txBody>
-                  <a:tcPr marL="76200" marR="76200" marT="12700" marB="12700" anchor="ctr">
+                  <a:tcPr marL="76200" marR="76200" marT="38100" marB="38100" anchor="ctr">
                     <a:lnL w="12700" cap="flat" cmpd="sng" algn="ctr">
                       <a:solidFill>
                         <a:srgbClr val="BFBFBF"/>
@@ -7120,7 +7081,7 @@
                   </a:tcPr>
                 </a:tc>
               </a:tr>
-              <a:tr h="548640">
+              <a:tr h="566928">
                 <a:tc>
                   <a:txBody>
                     <a:bodyPr/>
@@ -7128,12 +7089,12 @@
                     <a:p>
                       <a:pPr algn="l" indent="0" marL="0">
                         <a:lnSpc>
-                          <a:spcPts val="2040"/>
+                          <a:spcPts val="1920"/>
                         </a:lnSpc>
                         <a:buNone/>
                       </a:pPr>
                       <a:r>
-                        <a:rPr lang="ja-JP" altLang="en-US" sz="1700" b="1" dirty="0">
+                        <a:rPr lang="ja-JP" altLang="en-US" sz="1600" b="1" dirty="0">
                           <a:solidFill>
                             <a:srgbClr val="262626"/>
                           </a:solidFill>
@@ -7143,7 +7104,7 @@
                         </a:rPr>
                         <a:t>レボドパ</a:t>
                       </a:r>
-                      <a:endParaRPr lang="en-US" sz="1700" dirty="0">
+                      <a:endParaRPr lang="en-US" sz="1600" dirty="0">
                         <a:latin typeface="メイリオ" charset="0"/>
                         <a:ea typeface="メイリオ" charset="0"/>
                         <a:cs typeface="メイリオ" charset="0"/>
@@ -7152,12 +7113,12 @@
                     <a:p>
                       <a:pPr algn="l" indent="0" marL="0">
                         <a:lnSpc>
-                          <a:spcPts val="2040"/>
+                          <a:spcPts val="1920"/>
                         </a:lnSpc>
                         <a:buNone/>
                       </a:pPr>
                       <a:r>
-                        <a:rPr lang="ja-JP" altLang="en-US" sz="1700" b="1" dirty="0">
+                        <a:rPr lang="ja-JP" altLang="en-US" sz="1600" b="1" dirty="0">
                           <a:solidFill>
                             <a:srgbClr val="262626"/>
                           </a:solidFill>
@@ -7167,14 +7128,14 @@
                         </a:rPr>
                         <a:t>（パーキンソン病）</a:t>
                       </a:r>
-                      <a:endParaRPr lang="en-US" sz="1700" dirty="0">
+                      <a:endParaRPr lang="en-US" sz="1600" dirty="0">
                         <a:latin typeface="メイリオ" charset="0"/>
                         <a:ea typeface="メイリオ" charset="0"/>
                         <a:cs typeface="メイリオ" charset="0"/>
                       </a:endParaRPr>
                     </a:p>
                   </a:txBody>
-                  <a:tcPr marL="76200" marR="76200" marT="12700" marB="12700" anchor="ctr">
+                  <a:tcPr marL="76200" marR="76200" marT="38100" marB="38100" anchor="ctr">
                     <a:lnL w="12700" cap="flat" cmpd="sng" algn="ctr">
                       <a:solidFill>
                         <a:srgbClr val="BFBFBF"/>
@@ -7220,12 +7181,12 @@
                     <a:p>
                       <a:pPr algn="l" indent="0" marL="0">
                         <a:lnSpc>
-                          <a:spcPts val="2040"/>
+                          <a:spcPts val="1920"/>
                         </a:lnSpc>
                         <a:buNone/>
                       </a:pPr>
                       <a:r>
-                        <a:rPr lang="ja-JP" altLang="en-US" sz="1700" b="1" dirty="0">
+                        <a:rPr lang="ja-JP" altLang="en-US" sz="1600" b="1" dirty="0">
                           <a:solidFill>
                             <a:srgbClr val="0072B2"/>
                           </a:solidFill>
@@ -7235,14 +7196,14 @@
                         </a:rPr>
                         <a:t>少量の水で続ける</a:t>
                       </a:r>
-                      <a:endParaRPr lang="en-US" sz="1700" dirty="0">
+                      <a:endParaRPr lang="en-US" sz="1600" dirty="0">
                         <a:latin typeface="メイリオ" charset="0"/>
                         <a:ea typeface="メイリオ" charset="0"/>
                         <a:cs typeface="メイリオ" charset="0"/>
                       </a:endParaRPr>
                     </a:p>
                   </a:txBody>
-                  <a:tcPr marL="76200" marR="76200" marT="12700" marB="12700" anchor="ctr">
+                  <a:tcPr marL="76200" marR="76200" marT="38100" marB="38100" anchor="ctr">
                     <a:lnL w="12700" cap="flat" cmpd="sng" algn="ctr">
                       <a:solidFill>
                         <a:srgbClr val="BFBFBF"/>
@@ -7288,12 +7249,12 @@
                     <a:p>
                       <a:pPr algn="l" indent="0" marL="0">
                         <a:lnSpc>
-                          <a:spcPts val="2040"/>
+                          <a:spcPts val="1920"/>
                         </a:lnSpc>
                         <a:buNone/>
                       </a:pPr>
                       <a:r>
-                        <a:rPr lang="ja-JP" altLang="en-US" sz="1700" dirty="0">
+                        <a:rPr lang="ja-JP" altLang="en-US" sz="1600" dirty="0">
                           <a:solidFill>
                             <a:srgbClr val="262626"/>
                           </a:solidFill>
@@ -7303,7 +7264,7 @@
                         </a:rPr>
                         <a:t>急な中止で悪性症候群。絶食ならレボドパ静注。</a:t>
                       </a:r>
-                      <a:endParaRPr lang="en-US" sz="1700" dirty="0">
+                      <a:endParaRPr lang="en-US" sz="1600" dirty="0">
                         <a:latin typeface="メイリオ" charset="0"/>
                         <a:ea typeface="メイリオ" charset="0"/>
                         <a:cs typeface="メイリオ" charset="0"/>
@@ -7312,12 +7273,12 @@
                     <a:p>
                       <a:pPr algn="l" indent="0" marL="0">
                         <a:lnSpc>
-                          <a:spcPts val="2040"/>
+                          <a:spcPts val="1920"/>
                         </a:lnSpc>
                         <a:buNone/>
                       </a:pPr>
                       <a:r>
-                        <a:rPr lang="ja-JP" altLang="en-US" sz="1700" dirty="0">
+                        <a:rPr lang="ja-JP" altLang="en-US" sz="1600" dirty="0">
                           <a:solidFill>
                             <a:srgbClr val="262626"/>
                           </a:solidFill>
@@ -7327,14 +7288,14 @@
                         </a:rPr>
                         <a:t>メトクロプラミド・ハロペリドールを避ける</a:t>
                       </a:r>
-                      <a:endParaRPr lang="en-US" sz="1700" dirty="0">
+                      <a:endParaRPr lang="en-US" sz="1600" dirty="0">
                         <a:latin typeface="メイリオ" charset="0"/>
                         <a:ea typeface="メイリオ" charset="0"/>
                         <a:cs typeface="メイリオ" charset="0"/>
                       </a:endParaRPr>
                     </a:p>
                   </a:txBody>
-                  <a:tcPr marL="76200" marR="76200" marT="12700" marB="12700" anchor="ctr">
+                  <a:tcPr marL="76200" marR="76200" marT="38100" marB="38100" anchor="ctr">
                     <a:lnL w="12700" cap="flat" cmpd="sng" algn="ctr">
                       <a:solidFill>
                         <a:srgbClr val="BFBFBF"/>
@@ -7374,7 +7335,7 @@
                   </a:tcPr>
                 </a:tc>
               </a:tr>
-              <a:tr h="804672">
+              <a:tr h="813816">
                 <a:tc>
                   <a:txBody>
                     <a:bodyPr/>
@@ -7382,12 +7343,12 @@
                     <a:p>
                       <a:pPr algn="l" indent="0" marL="0">
                         <a:lnSpc>
-                          <a:spcPts val="2040"/>
+                          <a:spcPts val="1920"/>
                         </a:lnSpc>
                         <a:buNone/>
                       </a:pPr>
                       <a:r>
-                        <a:rPr lang="ja-JP" altLang="en-US" sz="1700" b="1" dirty="0">
+                        <a:rPr lang="ja-JP" altLang="en-US" sz="1600" b="1" dirty="0">
                           <a:solidFill>
                             <a:srgbClr val="262626"/>
                           </a:solidFill>
@@ -7397,7 +7358,7 @@
                         </a:rPr>
                         <a:t>MAO-B 阻害薬</a:t>
                       </a:r>
-                      <a:endParaRPr lang="en-US" sz="1700" dirty="0">
+                      <a:endParaRPr lang="en-US" sz="1600" dirty="0">
                         <a:latin typeface="メイリオ" charset="0"/>
                         <a:ea typeface="メイリオ" charset="0"/>
                         <a:cs typeface="メイリオ" charset="0"/>
@@ -7406,12 +7367,12 @@
                     <a:p>
                       <a:pPr algn="l" indent="0" marL="0">
                         <a:lnSpc>
-                          <a:spcPts val="2040"/>
+                          <a:spcPts val="1920"/>
                         </a:lnSpc>
                         <a:buNone/>
                       </a:pPr>
                       <a:r>
-                        <a:rPr lang="ja-JP" altLang="en-US" sz="1700" b="1" dirty="0">
+                        <a:rPr lang="ja-JP" altLang="en-US" sz="1600" b="1" dirty="0">
                           <a:solidFill>
                             <a:srgbClr val="262626"/>
                           </a:solidFill>
@@ -7421,14 +7382,14 @@
                         </a:rPr>
                         <a:t>（セレギリン）</a:t>
                       </a:r>
-                      <a:endParaRPr lang="en-US" sz="1700" dirty="0">
+                      <a:endParaRPr lang="en-US" sz="1600" dirty="0">
                         <a:latin typeface="メイリオ" charset="0"/>
                         <a:ea typeface="メイリオ" charset="0"/>
                         <a:cs typeface="メイリオ" charset="0"/>
                       </a:endParaRPr>
                     </a:p>
                   </a:txBody>
-                  <a:tcPr marL="76200" marR="76200" marT="12700" marB="12700" anchor="ctr">
+                  <a:tcPr marL="76200" marR="76200" marT="38100" marB="38100" anchor="ctr">
                     <a:lnL w="12700" cap="flat" cmpd="sng" algn="ctr">
                       <a:solidFill>
                         <a:srgbClr val="BFBFBF"/>
@@ -7474,12 +7435,12 @@
                     <a:p>
                       <a:pPr algn="l" indent="0" marL="0">
                         <a:lnSpc>
-                          <a:spcPts val="2040"/>
+                          <a:spcPts val="1920"/>
                         </a:lnSpc>
                         <a:buNone/>
                       </a:pPr>
                       <a:r>
-                        <a:rPr lang="ja-JP" altLang="en-US" sz="1700" b="1" dirty="0">
+                        <a:rPr lang="ja-JP" altLang="en-US" sz="1600" b="1" dirty="0">
                           <a:solidFill>
                             <a:srgbClr val="0072B2"/>
                           </a:solidFill>
@@ -7489,14 +7450,14 @@
                         </a:rPr>
                         <a:t>続ける</a:t>
                       </a:r>
-                      <a:endParaRPr lang="en-US" sz="1700" dirty="0">
+                      <a:endParaRPr lang="en-US" sz="1600" dirty="0">
                         <a:latin typeface="メイリオ" charset="0"/>
                         <a:ea typeface="メイリオ" charset="0"/>
                         <a:cs typeface="メイリオ" charset="0"/>
                       </a:endParaRPr>
                     </a:p>
                   </a:txBody>
-                  <a:tcPr marL="76200" marR="76200" marT="12700" marB="12700" anchor="ctr">
+                  <a:tcPr marL="76200" marR="76200" marT="38100" marB="38100" anchor="ctr">
                     <a:lnL w="12700" cap="flat" cmpd="sng" algn="ctr">
                       <a:solidFill>
                         <a:srgbClr val="BFBFBF"/>
@@ -7542,12 +7503,12 @@
                     <a:p>
                       <a:pPr algn="l" indent="0" marL="0">
                         <a:lnSpc>
-                          <a:spcPts val="2040"/>
+                          <a:spcPts val="1920"/>
                         </a:lnSpc>
                         <a:buNone/>
                       </a:pPr>
                       <a:r>
-                        <a:rPr lang="ja-JP" altLang="en-US" sz="1700" dirty="0">
+                        <a:rPr lang="ja-JP" altLang="en-US" sz="1600" dirty="0">
                           <a:solidFill>
                             <a:srgbClr val="262626"/>
                           </a:solidFill>
@@ -7557,7 +7518,7 @@
                         </a:rPr>
                         <a:t>ペチジン・トラマドール・タペンタドール、</a:t>
                       </a:r>
-                      <a:endParaRPr lang="en-US" sz="1700" dirty="0">
+                      <a:endParaRPr lang="en-US" sz="1600" dirty="0">
                         <a:latin typeface="メイリオ" charset="0"/>
                         <a:ea typeface="メイリオ" charset="0"/>
                         <a:cs typeface="メイリオ" charset="0"/>
@@ -7566,12 +7527,12 @@
                     <a:p>
                       <a:pPr algn="l" indent="0" marL="0">
                         <a:lnSpc>
-                          <a:spcPts val="2040"/>
+                          <a:spcPts val="1920"/>
                         </a:lnSpc>
                         <a:buNone/>
                       </a:pPr>
                       <a:r>
-                        <a:rPr lang="ja-JP" altLang="en-US" sz="1700" dirty="0">
+                        <a:rPr lang="ja-JP" altLang="en-US" sz="1600" dirty="0">
                           <a:solidFill>
                             <a:srgbClr val="262626"/>
                           </a:solidFill>
@@ -7581,7 +7542,7 @@
                         </a:rPr>
                         <a:t>三環系・SSRI・SNRI・ミルタザピンは併用禁忌。</a:t>
                       </a:r>
-                      <a:endParaRPr lang="en-US" sz="1700" dirty="0">
+                      <a:endParaRPr lang="en-US" sz="1600" dirty="0">
                         <a:latin typeface="メイリオ" charset="0"/>
                         <a:ea typeface="メイリオ" charset="0"/>
                         <a:cs typeface="メイリオ" charset="0"/>
@@ -7590,12 +7551,12 @@
                     <a:p>
                       <a:pPr algn="l" indent="0" marL="0">
                         <a:lnSpc>
-                          <a:spcPts val="2040"/>
+                          <a:spcPts val="1920"/>
                         </a:lnSpc>
                         <a:buNone/>
                       </a:pPr>
                       <a:r>
-                        <a:rPr lang="ja-JP" altLang="en-US" sz="1700" dirty="0">
+                        <a:rPr lang="ja-JP" altLang="en-US" sz="1600" dirty="0">
                           <a:solidFill>
                             <a:srgbClr val="262626"/>
                           </a:solidFill>
@@ -7605,14 +7566,14 @@
                         </a:rPr>
                         <a:t>エフェドリンを避けフェニレフリン少量</a:t>
                       </a:r>
-                      <a:endParaRPr lang="en-US" sz="1700" dirty="0">
+                      <a:endParaRPr lang="en-US" sz="1600" dirty="0">
                         <a:latin typeface="メイリオ" charset="0"/>
                         <a:ea typeface="メイリオ" charset="0"/>
                         <a:cs typeface="メイリオ" charset="0"/>
                       </a:endParaRPr>
                     </a:p>
                   </a:txBody>
-                  <a:tcPr marL="76200" marR="76200" marT="12700" marB="12700" anchor="ctr">
+                  <a:tcPr marL="76200" marR="76200" marT="38100" marB="38100" anchor="ctr">
                     <a:lnL w="12700" cap="flat" cmpd="sng" algn="ctr">
                       <a:solidFill>
                         <a:srgbClr val="BFBFBF"/>
@@ -7652,7 +7613,7 @@
                   </a:tcPr>
                 </a:tc>
               </a:tr>
-              <a:tr h="548640">
+              <a:tr h="566928">
                 <a:tc>
                   <a:txBody>
                     <a:bodyPr/>
@@ -7660,12 +7621,12 @@
                     <a:p>
                       <a:pPr algn="l" indent="0" marL="0">
                         <a:lnSpc>
-                          <a:spcPts val="2040"/>
+                          <a:spcPts val="1920"/>
                         </a:lnSpc>
                         <a:buNone/>
                       </a:pPr>
                       <a:r>
-                        <a:rPr lang="ja-JP" altLang="en-US" sz="1700" b="1" dirty="0">
+                        <a:rPr lang="ja-JP" altLang="en-US" sz="1600" b="1" dirty="0">
                           <a:solidFill>
                             <a:srgbClr val="262626"/>
                           </a:solidFill>
@@ -7673,40 +7634,16 @@
                           <a:ea typeface="メイリオ" pitchFamily="34" charset="-122"/>
                           <a:cs typeface="メイリオ" pitchFamily="34" charset="-120"/>
                         </a:rPr>
-                        <a:t>SSRI・SNRI・</a:t>
+                        <a:t>SSRI・SNRI・三環系</a:t>
                       </a:r>
-                      <a:endParaRPr lang="en-US" sz="1700" dirty="0">
-                        <a:latin typeface="メイリオ" charset="0"/>
-                        <a:ea typeface="メイリオ" charset="0"/>
-                        <a:cs typeface="メイリオ" charset="0"/>
-                      </a:endParaRPr>
-                    </a:p>
-                    <a:p>
-                      <a:pPr algn="l" indent="0" marL="0">
-                        <a:lnSpc>
-                          <a:spcPts val="2040"/>
-                        </a:lnSpc>
-                        <a:buNone/>
-                      </a:pPr>
-                      <a:r>
-                        <a:rPr lang="ja-JP" altLang="en-US" sz="1700" b="1" dirty="0">
-                          <a:solidFill>
-                            <a:srgbClr val="262626"/>
-                          </a:solidFill>
-                          <a:latin typeface="メイリオ" pitchFamily="34" charset="0"/>
-                          <a:ea typeface="メイリオ" pitchFamily="34" charset="-122"/>
-                          <a:cs typeface="メイリオ" pitchFamily="34" charset="-120"/>
-                        </a:rPr>
-                        <a:t>三環系</a:t>
-                      </a:r>
-                      <a:endParaRPr lang="en-US" sz="1700" dirty="0">
+                      <a:endParaRPr lang="en-US" sz="1600" dirty="0">
                         <a:latin typeface="メイリオ" charset="0"/>
                         <a:ea typeface="メイリオ" charset="0"/>
                         <a:cs typeface="メイリオ" charset="0"/>
                       </a:endParaRPr>
                     </a:p>
                   </a:txBody>
-                  <a:tcPr marL="76200" marR="76200" marT="12700" marB="12700" anchor="ctr">
+                  <a:tcPr marL="76200" marR="76200" marT="38100" marB="38100" anchor="ctr">
                     <a:lnL w="12700" cap="flat" cmpd="sng" algn="ctr">
                       <a:solidFill>
                         <a:srgbClr val="BFBFBF"/>
@@ -7752,12 +7689,12 @@
                     <a:p>
                       <a:pPr algn="l" indent="0" marL="0">
                         <a:lnSpc>
-                          <a:spcPts val="2040"/>
+                          <a:spcPts val="1920"/>
                         </a:lnSpc>
                         <a:buNone/>
                       </a:pPr>
                       <a:r>
-                        <a:rPr lang="ja-JP" altLang="en-US" sz="1700" b="1" dirty="0">
+                        <a:rPr lang="ja-JP" altLang="en-US" sz="1600" b="1" dirty="0">
                           <a:solidFill>
                             <a:srgbClr val="0072B2"/>
                           </a:solidFill>
@@ -7767,14 +7704,14 @@
                         </a:rPr>
                         <a:t>続ける</a:t>
                       </a:r>
-                      <a:endParaRPr lang="en-US" sz="1700" dirty="0">
+                      <a:endParaRPr lang="en-US" sz="1600" dirty="0">
                         <a:latin typeface="メイリオ" charset="0"/>
                         <a:ea typeface="メイリオ" charset="0"/>
                         <a:cs typeface="メイリオ" charset="0"/>
                       </a:endParaRPr>
                     </a:p>
                   </a:txBody>
-                  <a:tcPr marL="76200" marR="76200" marT="12700" marB="12700" anchor="ctr">
+                  <a:tcPr marL="76200" marR="76200" marT="38100" marB="38100" anchor="ctr">
                     <a:lnL w="12700" cap="flat" cmpd="sng" algn="ctr">
                       <a:solidFill>
                         <a:srgbClr val="BFBFBF"/>
@@ -7820,12 +7757,12 @@
                     <a:p>
                       <a:pPr algn="l" indent="0" marL="0">
                         <a:lnSpc>
-                          <a:spcPts val="2040"/>
+                          <a:spcPts val="1920"/>
                         </a:lnSpc>
                         <a:buNone/>
                       </a:pPr>
                       <a:r>
-                        <a:rPr lang="ja-JP" altLang="en-US" sz="1700" dirty="0">
+                        <a:rPr lang="ja-JP" altLang="en-US" sz="1600" dirty="0">
                           <a:solidFill>
                             <a:srgbClr val="262626"/>
                           </a:solidFill>
@@ -7835,7 +7772,7 @@
                         </a:rPr>
                         <a:t>出血が増える。セロトニン症候群（トラマドール、</a:t>
                       </a:r>
-                      <a:endParaRPr lang="en-US" sz="1700" dirty="0">
+                      <a:endParaRPr lang="en-US" sz="1600" dirty="0">
                         <a:latin typeface="メイリオ" charset="0"/>
                         <a:ea typeface="メイリオ" charset="0"/>
                         <a:cs typeface="メイリオ" charset="0"/>
@@ -7844,12 +7781,12 @@
                     <a:p>
                       <a:pPr algn="l" indent="0" marL="0">
                         <a:lnSpc>
-                          <a:spcPts val="2040"/>
+                          <a:spcPts val="1920"/>
                         </a:lnSpc>
                         <a:buNone/>
                       </a:pPr>
                       <a:r>
-                        <a:rPr lang="ja-JP" altLang="en-US" sz="1700" dirty="0">
+                        <a:rPr lang="ja-JP" altLang="en-US" sz="1600" dirty="0">
                           <a:solidFill>
                             <a:srgbClr val="262626"/>
                           </a:solidFill>
@@ -7859,14 +7796,14 @@
                         </a:rPr>
                         <a:t>ペチジン、メチレンブルー、リネゾリド）</a:t>
                       </a:r>
-                      <a:endParaRPr lang="en-US" sz="1700" dirty="0">
+                      <a:endParaRPr lang="en-US" sz="1600" dirty="0">
                         <a:latin typeface="メイリオ" charset="0"/>
                         <a:ea typeface="メイリオ" charset="0"/>
                         <a:cs typeface="メイリオ" charset="0"/>
                       </a:endParaRPr>
                     </a:p>
                   </a:txBody>
-                  <a:tcPr marL="76200" marR="76200" marT="12700" marB="12700" anchor="ctr">
+                  <a:tcPr marL="76200" marR="76200" marT="38100" marB="38100" anchor="ctr">
                     <a:lnL w="12700" cap="flat" cmpd="sng" algn="ctr">
                       <a:solidFill>
                         <a:srgbClr val="BFBFBF"/>
@@ -7906,7 +7843,7 @@
                   </a:tcPr>
                 </a:tc>
               </a:tr>
-              <a:tr h="804672">
+              <a:tr h="813816">
                 <a:tc>
                   <a:txBody>
                     <a:bodyPr/>
@@ -7914,12 +7851,12 @@
                     <a:p>
                       <a:pPr algn="l" indent="0" marL="0">
                         <a:lnSpc>
-                          <a:spcPts val="2040"/>
+                          <a:spcPts val="1920"/>
                         </a:lnSpc>
                         <a:buNone/>
                       </a:pPr>
                       <a:r>
-                        <a:rPr lang="ja-JP" altLang="en-US" sz="1700" b="1" dirty="0">
+                        <a:rPr lang="ja-JP" altLang="en-US" sz="1600" b="1" dirty="0">
                           <a:solidFill>
                             <a:srgbClr val="262626"/>
                           </a:solidFill>
@@ -7929,14 +7866,14 @@
                         </a:rPr>
                         <a:t>リチウム</a:t>
                       </a:r>
-                      <a:endParaRPr lang="en-US" sz="1700" dirty="0">
+                      <a:endParaRPr lang="en-US" sz="1600" dirty="0">
                         <a:latin typeface="メイリオ" charset="0"/>
                         <a:ea typeface="メイリオ" charset="0"/>
                         <a:cs typeface="メイリオ" charset="0"/>
                       </a:endParaRPr>
                     </a:p>
                   </a:txBody>
-                  <a:tcPr marL="76200" marR="76200" marT="12700" marB="12700" anchor="ctr">
+                  <a:tcPr marL="76200" marR="76200" marT="38100" marB="38100" anchor="ctr">
                     <a:lnL w="12700" cap="flat" cmpd="sng" algn="ctr">
                       <a:solidFill>
                         <a:srgbClr val="BFBFBF"/>
@@ -7982,12 +7919,12 @@
                     <a:p>
                       <a:pPr algn="l" indent="0" marL="0">
                         <a:lnSpc>
-                          <a:spcPts val="2040"/>
+                          <a:spcPts val="1920"/>
                         </a:lnSpc>
                         <a:buNone/>
                       </a:pPr>
                       <a:r>
-                        <a:rPr lang="ja-JP" altLang="en-US" sz="1700" dirty="0">
+                        <a:rPr lang="ja-JP" altLang="en-US" sz="1600" dirty="0">
                           <a:solidFill>
                             <a:srgbClr val="262626"/>
                           </a:solidFill>
@@ -7995,9 +7932,9 @@
                           <a:ea typeface="メイリオ" pitchFamily="34" charset="-122"/>
                           <a:cs typeface="メイリオ" pitchFamily="34" charset="-120"/>
                         </a:rPr>
-                        <a:t>小手術は継続。大量出血・</a:t>
+                        <a:t>小手術は継続。</a:t>
                       </a:r>
-                      <a:endParaRPr lang="en-US" sz="1700" dirty="0">
+                      <a:endParaRPr lang="en-US" sz="1600" dirty="0">
                         <a:latin typeface="メイリオ" charset="0"/>
                         <a:ea typeface="メイリオ" charset="0"/>
                         <a:cs typeface="メイリオ" charset="0"/>
@@ -8006,12 +7943,12 @@
                     <a:p>
                       <a:pPr algn="l" indent="0" marL="0">
                         <a:lnSpc>
-                          <a:spcPts val="2040"/>
+                          <a:spcPts val="1920"/>
                         </a:lnSpc>
                         <a:buNone/>
                       </a:pPr>
                       <a:r>
-                        <a:rPr lang="ja-JP" altLang="en-US" sz="1700" dirty="0">
+                        <a:rPr lang="ja-JP" altLang="en-US" sz="1600" dirty="0">
                           <a:solidFill>
                             <a:srgbClr val="262626"/>
                           </a:solidFill>
@@ -8019,9 +7956,9 @@
                           <a:ea typeface="メイリオ" pitchFamily="34" charset="-122"/>
                           <a:cs typeface="メイリオ" pitchFamily="34" charset="-120"/>
                         </a:rPr>
-                        <a:t>絶食が続く手術は</a:t>
+                        <a:t>大量出血・絶食が続く手術は</a:t>
                       </a:r>
-                      <a:endParaRPr lang="en-US" sz="1700" dirty="0">
+                      <a:endParaRPr lang="en-US" sz="1600" dirty="0">
                         <a:latin typeface="メイリオ" charset="0"/>
                         <a:ea typeface="メイリオ" charset="0"/>
                         <a:cs typeface="メイリオ" charset="0"/>
@@ -8030,12 +7967,12 @@
                     <a:p>
                       <a:pPr algn="l" indent="0" marL="0">
                         <a:lnSpc>
-                          <a:spcPts val="2040"/>
+                          <a:spcPts val="1920"/>
                         </a:lnSpc>
                         <a:buNone/>
                       </a:pPr>
                       <a:r>
-                        <a:rPr lang="ja-JP" altLang="en-US" sz="1700" dirty="0">
+                        <a:rPr lang="ja-JP" altLang="en-US" sz="1600" dirty="0">
                           <a:solidFill>
                             <a:srgbClr val="262626"/>
                           </a:solidFill>
@@ -8045,14 +7982,14 @@
                         </a:rPr>
                         <a:t>72 時間前に中止</a:t>
                       </a:r>
-                      <a:endParaRPr lang="en-US" sz="1700" dirty="0">
+                      <a:endParaRPr lang="en-US" sz="1600" dirty="0">
                         <a:latin typeface="メイリオ" charset="0"/>
                         <a:ea typeface="メイリオ" charset="0"/>
                         <a:cs typeface="メイリオ" charset="0"/>
                       </a:endParaRPr>
                     </a:p>
                   </a:txBody>
-                  <a:tcPr marL="76200" marR="76200" marT="12700" marB="12700" anchor="ctr">
+                  <a:tcPr marL="76200" marR="76200" marT="38100" marB="38100" anchor="ctr">
                     <a:lnL w="12700" cap="flat" cmpd="sng" algn="ctr">
                       <a:solidFill>
                         <a:srgbClr val="BFBFBF"/>
@@ -8098,12 +8035,12 @@
                     <a:p>
                       <a:pPr algn="l" indent="0" marL="0">
                         <a:lnSpc>
-                          <a:spcPts val="2040"/>
+                          <a:spcPts val="1920"/>
                         </a:lnSpc>
                         <a:buNone/>
                       </a:pPr>
                       <a:r>
-                        <a:rPr lang="ja-JP" altLang="en-US" sz="1700" dirty="0">
+                        <a:rPr lang="ja-JP" altLang="en-US" sz="1600" dirty="0">
                           <a:solidFill>
                             <a:srgbClr val="262626"/>
                           </a:solidFill>
@@ -8111,9 +8048,9 @@
                           <a:ea typeface="メイリオ" pitchFamily="34" charset="-122"/>
                           <a:cs typeface="メイリオ" pitchFamily="34" charset="-120"/>
                         </a:rPr>
-                        <a:t>脱水・NSAIDs・ACE 阻害薬・</a:t>
+                        <a:t>脱水・NSAIDs・ACE 阻害薬・サイアザイドで蓄積。</a:t>
                       </a:r>
-                      <a:endParaRPr lang="en-US" sz="1700" dirty="0">
+                      <a:endParaRPr lang="en-US" sz="1600" dirty="0">
                         <a:latin typeface="メイリオ" charset="0"/>
                         <a:ea typeface="メイリオ" charset="0"/>
                         <a:cs typeface="メイリオ" charset="0"/>
@@ -8122,12 +8059,12 @@
                     <a:p>
                       <a:pPr algn="l" indent="0" marL="0">
                         <a:lnSpc>
-                          <a:spcPts val="2040"/>
+                          <a:spcPts val="1920"/>
                         </a:lnSpc>
                         <a:buNone/>
                       </a:pPr>
                       <a:r>
-                        <a:rPr lang="ja-JP" altLang="en-US" sz="1700" dirty="0">
+                        <a:rPr lang="ja-JP" altLang="en-US" sz="1600" dirty="0">
                           <a:solidFill>
                             <a:srgbClr val="262626"/>
                           </a:solidFill>
@@ -8135,16 +8072,16 @@
                           <a:ea typeface="メイリオ" pitchFamily="34" charset="-122"/>
                           <a:cs typeface="メイリオ" pitchFamily="34" charset="-120"/>
                         </a:rPr>
-                        <a:t>サイアザイドで蓄積。再開は K・Na・Cr を見て</a:t>
+                        <a:t>再開は K・Na・Cr を見て</a:t>
                       </a:r>
-                      <a:endParaRPr lang="en-US" sz="1700" dirty="0">
+                      <a:endParaRPr lang="en-US" sz="1600" dirty="0">
                         <a:latin typeface="メイリオ" charset="0"/>
                         <a:ea typeface="メイリオ" charset="0"/>
                         <a:cs typeface="メイリオ" charset="0"/>
                       </a:endParaRPr>
                     </a:p>
                   </a:txBody>
-                  <a:tcPr marL="76200" marR="76200" marT="12700" marB="12700" anchor="ctr">
+                  <a:tcPr marL="76200" marR="76200" marT="38100" marB="38100" anchor="ctr">
                     <a:lnL w="12700" cap="flat" cmpd="sng" algn="ctr">
                       <a:solidFill>
                         <a:srgbClr val="BFBFBF"/>
@@ -8184,7 +8121,7 @@
                   </a:tcPr>
                 </a:tc>
               </a:tr>
-              <a:tr h="548640">
+              <a:tr h="566928">
                 <a:tc>
                   <a:txBody>
                     <a:bodyPr/>
@@ -8192,12 +8129,12 @@
                     <a:p>
                       <a:pPr algn="l" indent="0" marL="0">
                         <a:lnSpc>
-                          <a:spcPts val="2040"/>
+                          <a:spcPts val="1920"/>
                         </a:lnSpc>
                         <a:buNone/>
                       </a:pPr>
                       <a:r>
-                        <a:rPr lang="ja-JP" altLang="en-US" sz="1700" b="1" dirty="0">
+                        <a:rPr lang="ja-JP" altLang="en-US" sz="1600" b="1" dirty="0">
                           <a:solidFill>
                             <a:srgbClr val="262626"/>
                           </a:solidFill>
@@ -8207,14 +8144,14 @@
                         </a:rPr>
                         <a:t>抗精神病薬</a:t>
                       </a:r>
-                      <a:endParaRPr lang="en-US" sz="1700" dirty="0">
+                      <a:endParaRPr lang="en-US" sz="1600" dirty="0">
                         <a:latin typeface="メイリオ" charset="0"/>
                         <a:ea typeface="メイリオ" charset="0"/>
                         <a:cs typeface="メイリオ" charset="0"/>
                       </a:endParaRPr>
                     </a:p>
                   </a:txBody>
-                  <a:tcPr marL="76200" marR="76200" marT="12700" marB="12700" anchor="ctr">
+                  <a:tcPr marL="76200" marR="76200" marT="38100" marB="38100" anchor="ctr">
                     <a:lnL w="12700" cap="flat" cmpd="sng" algn="ctr">
                       <a:solidFill>
                         <a:srgbClr val="BFBFBF"/>
@@ -8260,12 +8197,12 @@
                     <a:p>
                       <a:pPr algn="l" indent="0" marL="0">
                         <a:lnSpc>
-                          <a:spcPts val="2040"/>
+                          <a:spcPts val="1920"/>
                         </a:lnSpc>
                         <a:buNone/>
                       </a:pPr>
                       <a:r>
-                        <a:rPr lang="ja-JP" altLang="en-US" sz="1700" b="1" dirty="0">
+                        <a:rPr lang="ja-JP" altLang="en-US" sz="1600" b="1" dirty="0">
                           <a:solidFill>
                             <a:srgbClr val="0072B2"/>
                           </a:solidFill>
@@ -8275,14 +8212,14 @@
                         </a:rPr>
                         <a:t>続ける（精神科と）</a:t>
                       </a:r>
-                      <a:endParaRPr lang="en-US" sz="1700" dirty="0">
+                      <a:endParaRPr lang="en-US" sz="1600" dirty="0">
                         <a:latin typeface="メイリオ" charset="0"/>
                         <a:ea typeface="メイリオ" charset="0"/>
                         <a:cs typeface="メイリオ" charset="0"/>
                       </a:endParaRPr>
                     </a:p>
                   </a:txBody>
-                  <a:tcPr marL="76200" marR="76200" marT="12700" marB="12700" anchor="ctr">
+                  <a:tcPr marL="76200" marR="76200" marT="38100" marB="38100" anchor="ctr">
                     <a:lnL w="12700" cap="flat" cmpd="sng" algn="ctr">
                       <a:solidFill>
                         <a:srgbClr val="BFBFBF"/>
@@ -8328,12 +8265,12 @@
                     <a:p>
                       <a:pPr algn="l" indent="0" marL="0">
                         <a:lnSpc>
-                          <a:spcPts val="2040"/>
+                          <a:spcPts val="1920"/>
                         </a:lnSpc>
                         <a:buNone/>
                       </a:pPr>
                       <a:r>
-                        <a:rPr lang="ja-JP" altLang="en-US" sz="1700" dirty="0">
+                        <a:rPr lang="ja-JP" altLang="en-US" sz="1600" dirty="0">
                           <a:solidFill>
                             <a:srgbClr val="262626"/>
                           </a:solidFill>
@@ -8343,7 +8280,7 @@
                         </a:rPr>
                         <a:t>QT 延長、錐体外路、悪性症候群。</a:t>
                       </a:r>
-                      <a:endParaRPr lang="en-US" sz="1700" dirty="0">
+                      <a:endParaRPr lang="en-US" sz="1600" dirty="0">
                         <a:latin typeface="メイリオ" charset="0"/>
                         <a:ea typeface="メイリオ" charset="0"/>
                         <a:cs typeface="メイリオ" charset="0"/>
@@ -8352,12 +8289,12 @@
                     <a:p>
                       <a:pPr algn="l" indent="0" marL="0">
                         <a:lnSpc>
-                          <a:spcPts val="2040"/>
+                          <a:spcPts val="1920"/>
                         </a:lnSpc>
                         <a:buNone/>
                       </a:pPr>
                       <a:r>
-                        <a:rPr lang="ja-JP" altLang="en-US" sz="1700" dirty="0">
+                        <a:rPr lang="ja-JP" altLang="en-US" sz="1600" dirty="0">
                           <a:solidFill>
                             <a:srgbClr val="262626"/>
                           </a:solidFill>
@@ -8367,14 +8304,14 @@
                         </a:rPr>
                         <a:t>パーキンソン病にハロペリドールは禁忌</a:t>
                       </a:r>
-                      <a:endParaRPr lang="en-US" sz="1700" dirty="0">
+                      <a:endParaRPr lang="en-US" sz="1600" dirty="0">
                         <a:latin typeface="メイリオ" charset="0"/>
                         <a:ea typeface="メイリオ" charset="0"/>
                         <a:cs typeface="メイリオ" charset="0"/>
                       </a:endParaRPr>
                     </a:p>
                   </a:txBody>
-                  <a:tcPr marL="76200" marR="76200" marT="12700" marB="12700" anchor="ctr">
+                  <a:tcPr marL="76200" marR="76200" marT="38100" marB="38100" anchor="ctr">
                     <a:lnL w="12700" cap="flat" cmpd="sng" algn="ctr">
                       <a:solidFill>
                         <a:srgbClr val="BFBFBF"/>
@@ -8852,7 +8789,7 @@
                 <a:ea typeface="メイリオ" pitchFamily="34" charset="-122"/>
                 <a:cs typeface="メイリオ" pitchFamily="34" charset="-120"/>
               </a:rPr>
-              <a:t>Cummings KC, et al. Mayo Clin Proc 2021;96:1342-1355（SPAQI） / 各製剤の添付文書</a:t>
+              <a:t>Cummings KC, et al. Mayo Clin Proc 2021;96:1342-1355（SPAQI） / 各製剤の添付文書（PMDA）</a:t>
             </a:r>
             <a:endParaRPr lang="ja-JP" sz="1600" dirty="0"/>
           </a:p>
@@ -8881,9 +8818,9 @@
             <a:tbl>
               <a:tblPr/>
               <a:tblGrid>
-                <a:gridCol w="2713025"/>
-                <a:gridCol w="2969057"/>
-                <a:gridCol w="5473598"/>
+                <a:gridCol w="2734056"/>
+                <a:gridCol w="3657600"/>
+                <a:gridCol w="4764024"/>
               </a:tblGrid>
               <a:tr h="356616">
                 <a:tc>
@@ -9741,7 +9678,7 @@
                           <a:ea typeface="メイリオ" pitchFamily="34" charset="-122"/>
                           <a:cs typeface="メイリオ" pitchFamily="34" charset="-120"/>
                         </a:rPr>
-                        <a:t>添付文書で禁忌</a:t>
+                        <a:t>添付文書で禁忌（静脈血栓塞栓症）。</a:t>
                       </a:r>
                       <a:endParaRPr lang="en-US" sz="1800" dirty="0">
                         <a:latin typeface="メイリオ" charset="0"/>
@@ -9765,7 +9702,7 @@
                           <a:ea typeface="メイリオ" pitchFamily="34" charset="-122"/>
                           <a:cs typeface="メイリオ" pitchFamily="34" charset="-120"/>
                         </a:rPr>
-                        <a:t>（静脈血栓塞栓症）。予約時に確認</a:t>
+                        <a:t>予約時に確認</a:t>
                       </a:r>
                       <a:endParaRPr lang="en-US" sz="1800" dirty="0">
                         <a:latin typeface="メイリオ" charset="0"/>
@@ -9903,31 +9840,7 @@
                           <a:ea typeface="メイリオ" pitchFamily="34" charset="-122"/>
                           <a:cs typeface="メイリオ" pitchFamily="34" charset="-120"/>
                         </a:rPr>
-                        <a:t>不動になる</a:t>
-                      </a:r>
-                      <a:endParaRPr lang="en-US" sz="1800" dirty="0">
-                        <a:latin typeface="メイリオ" charset="0"/>
-                        <a:ea typeface="メイリオ" charset="0"/>
-                        <a:cs typeface="メイリオ" charset="0"/>
-                      </a:endParaRPr>
-                    </a:p>
-                    <a:p>
-                      <a:pPr algn="l" indent="0" marL="0">
-                        <a:lnSpc>
-                          <a:spcPts val="2160"/>
-                        </a:lnSpc>
-                        <a:buNone/>
-                      </a:pPr>
-                      <a:r>
-                        <a:rPr lang="ja-JP" altLang="en-US" sz="1800" b="1" dirty="0">
-                          <a:solidFill>
-                            <a:srgbClr val="D55E00"/>
-                          </a:solidFill>
-                          <a:latin typeface="メイリオ" pitchFamily="34" charset="0"/>
-                          <a:ea typeface="メイリオ" pitchFamily="34" charset="-122"/>
-                          <a:cs typeface="メイリオ" pitchFamily="34" charset="-120"/>
-                        </a:rPr>
-                        <a:t>3 日前に中止</a:t>
+                        <a:t>不動になる 3 日前に中止</a:t>
                       </a:r>
                       <a:endParaRPr lang="en-US" sz="1800" dirty="0">
                         <a:latin typeface="メイリオ" charset="0"/>
@@ -10157,31 +10070,7 @@
                           <a:ea typeface="メイリオ" pitchFamily="34" charset="-122"/>
                           <a:cs typeface="メイリオ" pitchFamily="34" charset="-120"/>
                         </a:rPr>
-                        <a:t>サプリは</a:t>
-                      </a:r>
-                      <a:endParaRPr lang="en-US" sz="1800" dirty="0">
-                        <a:latin typeface="メイリオ" charset="0"/>
-                        <a:ea typeface="メイリオ" charset="0"/>
-                        <a:cs typeface="メイリオ" charset="0"/>
-                      </a:endParaRPr>
-                    </a:p>
-                    <a:p>
-                      <a:pPr algn="l" indent="0" marL="0">
-                        <a:lnSpc>
-                          <a:spcPts val="2160"/>
-                        </a:lnSpc>
-                        <a:buNone/>
-                      </a:pPr>
-                      <a:r>
-                        <a:rPr lang="ja-JP" altLang="en-US" sz="1800" dirty="0">
-                          <a:solidFill>
-                            <a:srgbClr val="262626"/>
-                          </a:solidFill>
-                          <a:latin typeface="メイリオ" pitchFamily="34" charset="0"/>
-                          <a:ea typeface="メイリオ" pitchFamily="34" charset="-122"/>
-                          <a:cs typeface="メイリオ" pitchFamily="34" charset="-120"/>
-                        </a:rPr>
-                        <a:t>1〜2 週前に中止。</a:t>
+                        <a:t>サプリは 1〜2 週前に中止。</a:t>
                       </a:r>
                       <a:endParaRPr lang="en-US" sz="1800" dirty="0">
                         <a:latin typeface="メイリオ" charset="0"/>
@@ -11038,7 +10927,7 @@
                 <a:ea typeface="メイリオ" pitchFamily="34" charset="-122"/>
                 <a:cs typeface="メイリオ" pitchFamily="34" charset="-120"/>
               </a:rPr>
-              <a:t>Mayo Clin Proc 2022;97:375-396 / Woodcock T, et al. Anaesthesia 2020;75:654-663</a:t>
+              <a:t>Mayo Clin Proc 2022;97:375-396（SPAQI） / Woodcock T, et al. Anaesthesia 2020;75:654-663</a:t>
             </a:r>
             <a:endParaRPr lang="ja-JP" sz="1600" dirty="0"/>
           </a:p>
@@ -11052,12 +10941,12 @@
         </p:nvSpPr>
         <p:spPr>
           <a:xfrm>
-            <a:off x="502920" y="5029200"/>
-            <a:ext cx="11183112" cy="859536"/>
+            <a:off x="502920" y="5105095"/>
+            <a:ext cx="11183112" cy="783641"/>
           </a:xfrm>
           <a:prstGeom prst="roundRect">
             <a:avLst>
-              <a:gd name="adj" fmla="val 10638"/>
+              <a:gd name="adj" fmla="val 11669"/>
             </a:avLst>
           </a:prstGeom>
           <a:solidFill>
@@ -11079,8 +10968,8 @@
         </p:nvSpPr>
         <p:spPr>
           <a:xfrm>
-            <a:off x="566928" y="5065776"/>
-            <a:ext cx="11055096" cy="420624"/>
+            <a:off x="566928" y="5141671"/>
+            <a:ext cx="11055096" cy="374904"/>
           </a:xfrm>
           <a:prstGeom prst="rect">
             <a:avLst/>
@@ -11096,7 +10985,7 @@
               <a:buNone/>
             </a:pPr>
             <a:r>
-              <a:rPr lang="ja-JP" altLang="en-US" sz="2400" b="1" dirty="0">
+              <a:rPr lang="ja-JP" altLang="en-US" sz="2200" b="1" dirty="0">
                 <a:solidFill>
                   <a:srgbClr val="262626"/>
                 </a:solidFill>
@@ -11107,7 +10996,7 @@
               <a:t>『飲む薬』</a:t>
             </a:r>
             <a:r>
-              <a:rPr lang="ja-JP" altLang="en-US" sz="2400" b="1" dirty="0">
+              <a:rPr lang="ja-JP" altLang="en-US" sz="2200" b="1" dirty="0">
                 <a:solidFill>
                   <a:srgbClr val="D55E00"/>
                 </a:solidFill>
@@ -11118,7 +11007,7 @@
               <a:t>『止める薬と再開日』</a:t>
             </a:r>
             <a:r>
-              <a:rPr lang="ja-JP" altLang="en-US" sz="2400" b="1" dirty="0">
+              <a:rPr lang="ja-JP" altLang="en-US" sz="2200" b="1" dirty="0">
                 <a:solidFill>
                   <a:srgbClr val="262626"/>
                 </a:solidFill>
@@ -11128,7 +11017,7 @@
               </a:rPr>
               <a:t>『相談した相手』を薬ごとに書き、</a:t>
             </a:r>
-            <a:endParaRPr lang="ja-JP" sz="2400" dirty="0"/>
+            <a:endParaRPr lang="ja-JP" sz="2200" dirty="0"/>
           </a:p>
         </p:txBody>
       </p:sp>
@@ -11140,8 +11029,8 @@
         </p:nvSpPr>
         <p:spPr>
           <a:xfrm>
-            <a:off x="566928" y="5431536"/>
-            <a:ext cx="11055096" cy="420624"/>
+            <a:off x="566928" y="5477256"/>
+            <a:ext cx="11055096" cy="374904"/>
           </a:xfrm>
           <a:prstGeom prst="rect">
             <a:avLst/>
@@ -11157,7 +11046,7 @@
               <a:buNone/>
             </a:pPr>
             <a:r>
-              <a:rPr lang="ja-JP" altLang="en-US" sz="2400" b="1" dirty="0">
+              <a:rPr lang="ja-JP" altLang="en-US" sz="2200" b="1" dirty="0">
                 <a:solidFill>
                   <a:srgbClr val="262626"/>
                 </a:solidFill>
@@ -11167,7 +11056,7 @@
               </a:rPr>
               <a:t>少量の水で飲ませる</a:t>
             </a:r>
-            <a:endParaRPr lang="ja-JP" sz="2400" dirty="0"/>
+            <a:endParaRPr lang="ja-JP" sz="2200" dirty="0"/>
           </a:p>
         </p:txBody>
       </p:sp>
@@ -11180,11 +11069,11 @@
         <p:spPr>
           <a:xfrm>
             <a:off x="502920" y="1664208"/>
-            <a:ext cx="3196742" cy="3145536"/>
+            <a:ext cx="3196742" cy="3184855"/>
           </a:xfrm>
           <a:prstGeom prst="roundRect">
             <a:avLst>
-              <a:gd name="adj" fmla="val 2326"/>
+              <a:gd name="adj" fmla="val 2297"/>
             </a:avLst>
           </a:prstGeom>
           <a:solidFill>
@@ -11372,7 +11261,7 @@
                   </a:tcPr>
                 </a:tc>
               </a:tr>
-              <a:tr h="594360">
+              <a:tr h="587045">
                 <a:tc>
                   <a:txBody>
                     <a:bodyPr/>
@@ -11402,7 +11291,7 @@
                       </a:endParaRPr>
                     </a:p>
                   </a:txBody>
-                  <a:tcPr marL="0" marR="0" marT="45720" marB="0" anchor="t">
+                  <a:tcPr marL="0" marR="0" marT="38100" marB="0" anchor="t">
                     <a:lnL w="0" cap="flat" cmpd="sng" algn="ctr">
                       <a:noFill/>
                     </a:lnL>
@@ -11470,7 +11359,7 @@
                       </a:endParaRPr>
                     </a:p>
                   </a:txBody>
-                  <a:tcPr marL="0" marR="0" marT="45720" marB="0" anchor="t">
+                  <a:tcPr marL="0" marR="0" marT="38100" marB="0" anchor="t">
                     <a:lnL w="0" cap="flat" cmpd="sng" algn="ctr">
                       <a:noFill/>
                     </a:lnL>
@@ -11486,7 +11375,7 @@
                   </a:tcPr>
                 </a:tc>
               </a:tr>
-              <a:tr h="868680">
+              <a:tr h="861365">
                 <a:tc>
                   <a:txBody>
                     <a:bodyPr/>
@@ -11516,7 +11405,7 @@
                       </a:endParaRPr>
                     </a:p>
                   </a:txBody>
-                  <a:tcPr marL="0" marR="0" marT="45720" marB="0" anchor="t">
+                  <a:tcPr marL="0" marR="0" marT="38100" marB="0" anchor="t">
                     <a:lnL w="0" cap="flat" cmpd="sng" algn="ctr">
                       <a:noFill/>
                     </a:lnL>
@@ -11608,7 +11497,7 @@
                       </a:endParaRPr>
                     </a:p>
                   </a:txBody>
-                  <a:tcPr marL="0" marR="0" marT="45720" marB="0" anchor="t">
+                  <a:tcPr marL="0" marR="0" marT="38100" marB="0" anchor="t">
                     <a:lnL w="0" cap="flat" cmpd="sng" algn="ctr">
                       <a:noFill/>
                     </a:lnL>
@@ -11624,7 +11513,7 @@
                   </a:tcPr>
                 </a:tc>
               </a:tr>
-              <a:tr h="594360">
+              <a:tr h="587045">
                 <a:tc>
                   <a:txBody>
                     <a:bodyPr/>
@@ -11654,7 +11543,7 @@
                       </a:endParaRPr>
                     </a:p>
                   </a:txBody>
-                  <a:tcPr marL="0" marR="0" marT="45720" marB="0" anchor="t">
+                  <a:tcPr marL="0" marR="0" marT="38100" marB="0" anchor="t">
                     <a:lnL w="0" cap="flat" cmpd="sng" algn="ctr">
                       <a:noFill/>
                     </a:lnL>
@@ -11722,7 +11611,7 @@
                       </a:endParaRPr>
                     </a:p>
                   </a:txBody>
-                  <a:tcPr marL="0" marR="0" marT="45720" marB="0" anchor="t">
+                  <a:tcPr marL="0" marR="0" marT="38100" marB="0" anchor="t">
                     <a:lnL w="0" cap="flat" cmpd="sng" algn="ctr">
                       <a:noFill/>
                     </a:lnL>
@@ -11751,11 +11640,11 @@
         <p:spPr>
           <a:xfrm>
             <a:off x="3919118" y="1664208"/>
-            <a:ext cx="4348886" cy="3145536"/>
+            <a:ext cx="4348886" cy="3184855"/>
           </a:xfrm>
           <a:prstGeom prst="roundRect">
             <a:avLst>
-              <a:gd name="adj" fmla="val 2326"/>
+              <a:gd name="adj" fmla="val 2297"/>
             </a:avLst>
           </a:prstGeom>
           <a:solidFill>
@@ -11943,7 +11832,7 @@
                   </a:tcPr>
                 </a:tc>
               </a:tr>
-              <a:tr h="375818">
+              <a:tr h="371246">
                 <a:tc>
                   <a:txBody>
                     <a:bodyPr/>
@@ -11973,7 +11862,7 @@
                       </a:endParaRPr>
                     </a:p>
                   </a:txBody>
-                  <a:tcPr marL="0" marR="0" marT="101600" marB="0" anchor="t">
+                  <a:tcPr marL="0" marR="0" marT="96520" marB="0" anchor="t">
                     <a:lnL w="0" cap="flat" cmpd="sng" algn="ctr">
                       <a:noFill/>
                     </a:lnL>
@@ -12017,7 +11906,7 @@
                       </a:endParaRPr>
                     </a:p>
                   </a:txBody>
-                  <a:tcPr marL="0" marR="0" marT="101600" marB="0" anchor="t">
+                  <a:tcPr marL="0" marR="0" marT="96520" marB="0" anchor="t">
                     <a:lnL w="0" cap="flat" cmpd="sng" algn="ctr">
                       <a:noFill/>
                     </a:lnL>
@@ -12033,7 +11922,7 @@
                   </a:tcPr>
                 </a:tc>
               </a:tr>
-              <a:tr h="375818">
+              <a:tr h="371246">
                 <a:tc>
                   <a:txBody>
                     <a:bodyPr/>
@@ -12063,7 +11952,7 @@
                       </a:endParaRPr>
                     </a:p>
                   </a:txBody>
-                  <a:tcPr marL="0" marR="0" marT="101600" marB="0" anchor="t">
+                  <a:tcPr marL="0" marR="0" marT="96520" marB="0" anchor="t">
                     <a:lnL w="0" cap="flat" cmpd="sng" algn="ctr">
                       <a:noFill/>
                     </a:lnL>
@@ -12107,7 +11996,7 @@
                       </a:endParaRPr>
                     </a:p>
                   </a:txBody>
-                  <a:tcPr marL="0" marR="0" marT="101600" marB="0" anchor="t">
+                  <a:tcPr marL="0" marR="0" marT="96520" marB="0" anchor="t">
                     <a:lnL w="0" cap="flat" cmpd="sng" algn="ctr">
                       <a:noFill/>
                     </a:lnL>
@@ -12123,7 +12012,7 @@
                   </a:tcPr>
                 </a:tc>
               </a:tr>
-              <a:tr h="650138">
+              <a:tr h="645566">
                 <a:tc>
                   <a:txBody>
                     <a:bodyPr/>
@@ -12153,7 +12042,7 @@
                       </a:endParaRPr>
                     </a:p>
                   </a:txBody>
-                  <a:tcPr marL="0" marR="0" marT="101600" marB="0" anchor="t">
+                  <a:tcPr marL="0" marR="0" marT="96520" marB="0" anchor="t">
                     <a:lnL w="0" cap="flat" cmpd="sng" algn="ctr">
                       <a:noFill/>
                     </a:lnL>
@@ -12221,7 +12110,7 @@
                       </a:endParaRPr>
                     </a:p>
                   </a:txBody>
-                  <a:tcPr marL="0" marR="0" marT="101600" marB="0" anchor="t">
+                  <a:tcPr marL="0" marR="0" marT="96520" marB="0" anchor="t">
                     <a:lnL w="0" cap="flat" cmpd="sng" algn="ctr">
                       <a:noFill/>
                     </a:lnL>
@@ -12237,7 +12126,7 @@
                   </a:tcPr>
                 </a:tc>
               </a:tr>
-              <a:tr h="650138">
+              <a:tr h="645566">
                 <a:tc>
                   <a:txBody>
                     <a:bodyPr/>
@@ -12267,7 +12156,7 @@
                       </a:endParaRPr>
                     </a:p>
                   </a:txBody>
-                  <a:tcPr marL="0" marR="0" marT="101600" marB="0" anchor="t">
+                  <a:tcPr marL="0" marR="0" marT="96520" marB="0" anchor="t">
                     <a:lnL w="0" cap="flat" cmpd="sng" algn="ctr">
                       <a:noFill/>
                     </a:lnL>
@@ -12335,7 +12224,7 @@
                       </a:endParaRPr>
                     </a:p>
                   </a:txBody>
-                  <a:tcPr marL="0" marR="0" marT="101600" marB="0" anchor="t">
+                  <a:tcPr marL="0" marR="0" marT="96520" marB="0" anchor="t">
                     <a:lnL w="0" cap="flat" cmpd="sng" algn="ctr">
                       <a:noFill/>
                     </a:lnL>
@@ -12364,11 +12253,11 @@
         <p:spPr>
           <a:xfrm>
             <a:off x="8487461" y="1664208"/>
-            <a:ext cx="3196742" cy="3145536"/>
+            <a:ext cx="3196742" cy="3184855"/>
           </a:xfrm>
           <a:prstGeom prst="roundRect">
             <a:avLst>
-              <a:gd name="adj" fmla="val 2326"/>
+              <a:gd name="adj" fmla="val 2297"/>
             </a:avLst>
           </a:prstGeom>
           <a:solidFill>
@@ -12556,7 +12445,7 @@
                   </a:tcPr>
                 </a:tc>
               </a:tr>
-              <a:tr h="375818">
+              <a:tr h="371246">
                 <a:tc>
                   <a:txBody>
                     <a:bodyPr/>
@@ -12586,7 +12475,7 @@
                       </a:endParaRPr>
                     </a:p>
                   </a:txBody>
-                  <a:tcPr marL="0" marR="0" marT="101600" marB="0" anchor="t">
+                  <a:tcPr marL="0" marR="0" marT="96520" marB="0" anchor="t">
                     <a:lnL w="0" cap="flat" cmpd="sng" algn="ctr">
                       <a:noFill/>
                     </a:lnL>
@@ -12630,7 +12519,7 @@
                       </a:endParaRPr>
                     </a:p>
                   </a:txBody>
-                  <a:tcPr marL="0" marR="0" marT="101600" marB="0" anchor="t">
+                  <a:tcPr marL="0" marR="0" marT="96520" marB="0" anchor="t">
                     <a:lnL w="0" cap="flat" cmpd="sng" algn="ctr">
                       <a:noFill/>
                     </a:lnL>
@@ -12646,7 +12535,7 @@
                   </a:tcPr>
                 </a:tc>
               </a:tr>
-              <a:tr h="650138">
+              <a:tr h="645566">
                 <a:tc>
                   <a:txBody>
                     <a:bodyPr/>
@@ -12676,7 +12565,7 @@
                       </a:endParaRPr>
                     </a:p>
                   </a:txBody>
-                  <a:tcPr marL="0" marR="0" marT="101600" marB="0" anchor="t">
+                  <a:tcPr marL="0" marR="0" marT="96520" marB="0" anchor="t">
                     <a:lnL w="0" cap="flat" cmpd="sng" algn="ctr">
                       <a:noFill/>
                     </a:lnL>
@@ -12744,7 +12633,7 @@
                       </a:endParaRPr>
                     </a:p>
                   </a:txBody>
-                  <a:tcPr marL="0" marR="0" marT="101600" marB="0" anchor="t">
+                  <a:tcPr marL="0" marR="0" marT="96520" marB="0" anchor="t">
                     <a:lnL w="0" cap="flat" cmpd="sng" algn="ctr">
                       <a:noFill/>
                     </a:lnL>
@@ -12760,7 +12649,7 @@
                   </a:tcPr>
                 </a:tc>
               </a:tr>
-              <a:tr h="650138">
+              <a:tr h="645566">
                 <a:tc>
                   <a:txBody>
                     <a:bodyPr/>
@@ -12790,7 +12679,7 @@
                       </a:endParaRPr>
                     </a:p>
                   </a:txBody>
-                  <a:tcPr marL="0" marR="0" marT="101600" marB="0" anchor="t">
+                  <a:tcPr marL="0" marR="0" marT="96520" marB="0" anchor="t">
                     <a:lnL w="0" cap="flat" cmpd="sng" algn="ctr">
                       <a:noFill/>
                     </a:lnL>
@@ -12858,7 +12747,7 @@
                       </a:endParaRPr>
                     </a:p>
                   </a:txBody>
-                  <a:tcPr marL="0" marR="0" marT="101600" marB="0" anchor="t">
+                  <a:tcPr marL="0" marR="0" marT="96520" marB="0" anchor="t">
                     <a:lnL w="0" cap="flat" cmpd="sng" algn="ctr">
                       <a:noFill/>
                     </a:lnL>
@@ -12874,7 +12763,7 @@
                   </a:tcPr>
                 </a:tc>
               </a:tr>
-              <a:tr h="375818">
+              <a:tr h="371246">
                 <a:tc>
                   <a:txBody>
                     <a:bodyPr/>
@@ -12904,7 +12793,7 @@
                       </a:endParaRPr>
                     </a:p>
                   </a:txBody>
-                  <a:tcPr marL="0" marR="0" marT="101600" marB="0" anchor="t">
+                  <a:tcPr marL="0" marR="0" marT="96520" marB="0" anchor="t">
                     <a:lnL w="0" cap="flat" cmpd="sng" algn="ctr">
                       <a:noFill/>
                     </a:lnL>
@@ -12948,7 +12837,7 @@
                       </a:endParaRPr>
                     </a:p>
                   </a:txBody>
-                  <a:tcPr marL="0" marR="0" marT="101600" marB="0" anchor="t">
+                  <a:tcPr marL="0" marR="0" marT="96520" marB="0" anchor="t">
                     <a:lnL w="0" cap="flat" cmpd="sng" algn="ctr">
                       <a:noFill/>
                     </a:lnL>
